--- a/curso/pptx/S22.pptx
+++ b/curso/pptx/S22.pptx
@@ -3891,8 +3891,8 @@
         </p:nvSpPr>
         <p:spPr>
           <a:xfrm>
-            <a:off x="640000" y="420000"/>
-            <a:ext cx="10912000" cy="420000"/>
+            <a:off x="10652000" y="380000"/>
+            <a:ext cx="900000" cy="800000"/>
           </a:xfrm>
           <a:prstGeom prst="rect">
             <a:avLst/>
@@ -3907,17 +3907,17 @@
           <a:p>
             <a:pPr>
               <a:spcAft>
-                <a:spcPts val="810"/>
+                <a:spcPts val="1980"/>
               </a:spcAft>
             </a:pPr>
             <a:r>
-              <a:rPr sz="1800" b="1">
+              <a:rPr sz="4400" b="0">
                 <a:solidFill>
                   <a:srgbClr val="1F2A44"/>
                 </a:solidFill>
                 <a:latin typeface="Nunito Sans"/>
               </a:rPr>
-              <a:t>🦉 Aula de Filosofía</a:t>
+              <a:t>🙃</a:t>
             </a:r>
           </a:p>
         </p:txBody>

--- a/curso/pptx/S22.pptx
+++ b/curso/pptx/S22.pptx
@@ -472,426 +472,6 @@
     </a:lvl9pPr>
   </p:notesStyle>
 </p:notesMaster>
-</file>
-
-<file path=ppt/notesSlides/notesSlide1.xml><?xml version="1.0" encoding="utf-8"?>
-<p:notes xmlns:a="http://schemas.openxmlformats.org/drawingml/2006/main" xmlns:p="http://schemas.openxmlformats.org/presentationml/2006/main" xmlns:r="http://schemas.openxmlformats.org/officeDocument/2006/relationships">
-  <p:cSld>
-    <p:spTree>
-      <p:nvGrpSpPr>
-        <p:cNvPr id="1" name=""/>
-        <p:cNvGrpSpPr/>
-        <p:nvPr/>
-      </p:nvGrpSpPr>
-      <p:grpSpPr>
-        <a:xfrm>
-          <a:off x="0" y="0"/>
-          <a:ext cx="0" cy="0"/>
-          <a:chOff x="0" y="0"/>
-          <a:chExt cx="0" cy="0"/>
-        </a:xfrm>
-      </p:grpSpPr>
-      <p:sp>
-        <p:nvSpPr>
-          <p:cNvPr id="2" name="Slide Image Placeholder 1"/>
-          <p:cNvSpPr>
-            <a:spLocks noGrp="1"/>
-          </p:cNvSpPr>
-          <p:nvPr>
-            <p:ph type="sldImg" idx="2"/>
-          </p:nvPr>
-        </p:nvSpPr>
-        <p:spPr/>
-      </p:sp>
-      <p:sp>
-        <p:nvSpPr>
-          <p:cNvPr id="3" name="Notes Placeholder 2"/>
-          <p:cNvSpPr>
-            <a:spLocks noGrp="1"/>
-          </p:cNvSpPr>
-          <p:nvPr>
-            <p:ph type="body" idx="3" sz="quarter"/>
-          </p:nvPr>
-        </p:nvSpPr>
-        <p:spPr/>
-        <p:txBody>
-          <a:bodyPr/>
-          <a:lstStyle/>
-          <a:p>
-            <a:r>
-              <a:t>3 minutos. Sin apuntes. Es para recordar, no cuenta para nota.</a:t>
-            </a:r>
-          </a:p>
-        </p:txBody>
-      </p:sp>
-      <p:sp>
-        <p:nvSpPr>
-          <p:cNvPr id="4" name="Slide Number Placeholder 3"/>
-          <p:cNvSpPr>
-            <a:spLocks noGrp="1"/>
-          </p:cNvSpPr>
-          <p:nvPr>
-            <p:ph type="sldNum" idx="5" sz="quarter"/>
-          </p:nvPr>
-        </p:nvSpPr>
-        <p:spPr/>
-      </p:sp>
-    </p:spTree>
-  </p:cSld>
-  <p:clrMapOvr>
-    <a:masterClrMapping/>
-  </p:clrMapOvr>
-</p:notes>
-</file>
-
-<file path=ppt/notesSlides/notesSlide2.xml><?xml version="1.0" encoding="utf-8"?>
-<p:notes xmlns:a="http://schemas.openxmlformats.org/drawingml/2006/main" xmlns:p="http://schemas.openxmlformats.org/presentationml/2006/main" xmlns:r="http://schemas.openxmlformats.org/officeDocument/2006/relationships">
-  <p:cSld>
-    <p:spTree>
-      <p:nvGrpSpPr>
-        <p:cNvPr id="1" name=""/>
-        <p:cNvGrpSpPr/>
-        <p:nvPr/>
-      </p:nvGrpSpPr>
-      <p:grpSpPr>
-        <a:xfrm>
-          <a:off x="0" y="0"/>
-          <a:ext cx="0" cy="0"/>
-          <a:chOff x="0" y="0"/>
-          <a:chExt cx="0" cy="0"/>
-        </a:xfrm>
-      </p:grpSpPr>
-      <p:sp>
-        <p:nvSpPr>
-          <p:cNvPr id="2" name="Slide Image Placeholder 1"/>
-          <p:cNvSpPr>
-            <a:spLocks noGrp="1"/>
-          </p:cNvSpPr>
-          <p:nvPr>
-            <p:ph type="sldImg" idx="2"/>
-          </p:nvPr>
-        </p:nvSpPr>
-        <p:spPr/>
-      </p:sp>
-      <p:sp>
-        <p:nvSpPr>
-          <p:cNvPr id="3" name="Notes Placeholder 2"/>
-          <p:cNvSpPr>
-            <a:spLocks noGrp="1"/>
-          </p:cNvSpPr>
-          <p:nvPr>
-            <p:ph type="body" idx="3" sz="quarter"/>
-          </p:nvPr>
-        </p:nvSpPr>
-        <p:spPr/>
-        <p:txBody>
-          <a:bodyPr/>
-          <a:lstStyle/>
-          <a:p>
-            <a:r>
-              <a:t>3 minutos. Sin apuntes. Es para recordar, no cuenta para nota.</a:t>
-            </a:r>
-          </a:p>
-        </p:txBody>
-      </p:sp>
-      <p:sp>
-        <p:nvSpPr>
-          <p:cNvPr id="4" name="Slide Number Placeholder 3"/>
-          <p:cNvSpPr>
-            <a:spLocks noGrp="1"/>
-          </p:cNvSpPr>
-          <p:nvPr>
-            <p:ph type="sldNum" idx="5" sz="quarter"/>
-          </p:nvPr>
-        </p:nvSpPr>
-        <p:spPr/>
-      </p:sp>
-    </p:spTree>
-  </p:cSld>
-  <p:clrMapOvr>
-    <a:masterClrMapping/>
-  </p:clrMapOvr>
-</p:notes>
-</file>
-
-<file path=ppt/notesSlides/notesSlide3.xml><?xml version="1.0" encoding="utf-8"?>
-<p:notes xmlns:a="http://schemas.openxmlformats.org/drawingml/2006/main" xmlns:p="http://schemas.openxmlformats.org/presentationml/2006/main" xmlns:r="http://schemas.openxmlformats.org/officeDocument/2006/relationships">
-  <p:cSld>
-    <p:spTree>
-      <p:nvGrpSpPr>
-        <p:cNvPr id="1" name=""/>
-        <p:cNvGrpSpPr/>
-        <p:nvPr/>
-      </p:nvGrpSpPr>
-      <p:grpSpPr>
-        <a:xfrm>
-          <a:off x="0" y="0"/>
-          <a:ext cx="0" cy="0"/>
-          <a:chOff x="0" y="0"/>
-          <a:chExt cx="0" cy="0"/>
-        </a:xfrm>
-      </p:grpSpPr>
-      <p:sp>
-        <p:nvSpPr>
-          <p:cNvPr id="2" name="Slide Image Placeholder 1"/>
-          <p:cNvSpPr>
-            <a:spLocks noGrp="1"/>
-          </p:cNvSpPr>
-          <p:nvPr>
-            <p:ph type="sldImg" idx="2"/>
-          </p:nvPr>
-        </p:nvSpPr>
-        <p:spPr/>
-      </p:sp>
-      <p:sp>
-        <p:nvSpPr>
-          <p:cNvPr id="3" name="Notes Placeholder 2"/>
-          <p:cNvSpPr>
-            <a:spLocks noGrp="1"/>
-          </p:cNvSpPr>
-          <p:nvPr>
-            <p:ph type="body" idx="3" sz="quarter"/>
-          </p:nvPr>
-        </p:nvSpPr>
-        <p:spPr/>
-        <p:txBody>
-          <a:bodyPr/>
-          <a:lstStyle/>
-          <a:p>
-            <a:r>
-              <a:t>Nadie tiene que contestar: solo pensarlo.</a:t>
-            </a:r>
-          </a:p>
-        </p:txBody>
-      </p:sp>
-      <p:sp>
-        <p:nvSpPr>
-          <p:cNvPr id="4" name="Slide Number Placeholder 3"/>
-          <p:cNvSpPr>
-            <a:spLocks noGrp="1"/>
-          </p:cNvSpPr>
-          <p:nvPr>
-            <p:ph type="sldNum" idx="5" sz="quarter"/>
-          </p:nvPr>
-        </p:nvSpPr>
-        <p:spPr/>
-      </p:sp>
-    </p:spTree>
-  </p:cSld>
-  <p:clrMapOvr>
-    <a:masterClrMapping/>
-  </p:clrMapOvr>
-</p:notes>
-</file>
-
-<file path=ppt/notesSlides/notesSlide4.xml><?xml version="1.0" encoding="utf-8"?>
-<p:notes xmlns:a="http://schemas.openxmlformats.org/drawingml/2006/main" xmlns:p="http://schemas.openxmlformats.org/presentationml/2006/main" xmlns:r="http://schemas.openxmlformats.org/officeDocument/2006/relationships">
-  <p:cSld>
-    <p:spTree>
-      <p:nvGrpSpPr>
-        <p:cNvPr id="1" name=""/>
-        <p:cNvGrpSpPr/>
-        <p:nvPr/>
-      </p:nvGrpSpPr>
-      <p:grpSpPr>
-        <a:xfrm>
-          <a:off x="0" y="0"/>
-          <a:ext cx="0" cy="0"/>
-          <a:chOff x="0" y="0"/>
-          <a:chExt cx="0" cy="0"/>
-        </a:xfrm>
-      </p:grpSpPr>
-      <p:sp>
-        <p:nvSpPr>
-          <p:cNvPr id="2" name="Slide Image Placeholder 1"/>
-          <p:cNvSpPr>
-            <a:spLocks noGrp="1"/>
-          </p:cNvSpPr>
-          <p:nvPr>
-            <p:ph type="sldImg" idx="2"/>
-          </p:nvPr>
-        </p:nvSpPr>
-        <p:spPr/>
-      </p:sp>
-      <p:sp>
-        <p:nvSpPr>
-          <p:cNvPr id="3" name="Notes Placeholder 2"/>
-          <p:cNvSpPr>
-            <a:spLocks noGrp="1"/>
-          </p:cNvSpPr>
-          <p:nvPr>
-            <p:ph type="body" idx="3" sz="quarter"/>
-          </p:nvPr>
-        </p:nvSpPr>
-        <p:spPr/>
-        <p:txBody>
-          <a:bodyPr/>
-          <a:lstStyle/>
-          <a:p>
-            <a:r>
-              <a:t>Dejar unos segundos para que piensen la respuesta fácil antes de enseñar los pasos.</a:t>
-            </a:r>
-          </a:p>
-        </p:txBody>
-      </p:sp>
-      <p:sp>
-        <p:nvSpPr>
-          <p:cNvPr id="4" name="Slide Number Placeholder 3"/>
-          <p:cNvSpPr>
-            <a:spLocks noGrp="1"/>
-          </p:cNvSpPr>
-          <p:nvPr>
-            <p:ph type="sldNum" idx="5" sz="quarter"/>
-          </p:nvPr>
-        </p:nvSpPr>
-        <p:spPr/>
-      </p:sp>
-    </p:spTree>
-  </p:cSld>
-  <p:clrMapOvr>
-    <a:masterClrMapping/>
-  </p:clrMapOvr>
-</p:notes>
-</file>
-
-<file path=ppt/notesSlides/notesSlide5.xml><?xml version="1.0" encoding="utf-8"?>
-<p:notes xmlns:a="http://schemas.openxmlformats.org/drawingml/2006/main" xmlns:p="http://schemas.openxmlformats.org/presentationml/2006/main" xmlns:r="http://schemas.openxmlformats.org/officeDocument/2006/relationships">
-  <p:cSld>
-    <p:spTree>
-      <p:nvGrpSpPr>
-        <p:cNvPr id="1" name=""/>
-        <p:cNvGrpSpPr/>
-        <p:nvPr/>
-      </p:nvGrpSpPr>
-      <p:grpSpPr>
-        <a:xfrm>
-          <a:off x="0" y="0"/>
-          <a:ext cx="0" cy="0"/>
-          <a:chOff x="0" y="0"/>
-          <a:chExt cx="0" cy="0"/>
-        </a:xfrm>
-      </p:grpSpPr>
-      <p:sp>
-        <p:nvSpPr>
-          <p:cNvPr id="2" name="Slide Image Placeholder 1"/>
-          <p:cNvSpPr>
-            <a:spLocks noGrp="1"/>
-          </p:cNvSpPr>
-          <p:nvPr>
-            <p:ph type="sldImg" idx="2"/>
-          </p:nvPr>
-        </p:nvSpPr>
-        <p:spPr/>
-      </p:sp>
-      <p:sp>
-        <p:nvSpPr>
-          <p:cNvPr id="3" name="Notes Placeholder 2"/>
-          <p:cNvSpPr>
-            <a:spLocks noGrp="1"/>
-          </p:cNvSpPr>
-          <p:nvPr>
-            <p:ph type="body" idx="3" sz="quarter"/>
-          </p:nvPr>
-        </p:nvSpPr>
-        <p:spPr/>
-        <p:txBody>
-          <a:bodyPr/>
-          <a:lstStyle/>
-          <a:p>
-            <a:r>
-              <a:t>Dejar 2 minutos para que lo escriban. La diapositiva siguiente muestra el resumen.</a:t>
-            </a:r>
-          </a:p>
-        </p:txBody>
-      </p:sp>
-      <p:sp>
-        <p:nvSpPr>
-          <p:cNvPr id="4" name="Slide Number Placeholder 3"/>
-          <p:cNvSpPr>
-            <a:spLocks noGrp="1"/>
-          </p:cNvSpPr>
-          <p:nvPr>
-            <p:ph type="sldNum" idx="5" sz="quarter"/>
-          </p:nvPr>
-        </p:nvSpPr>
-        <p:spPr/>
-      </p:sp>
-    </p:spTree>
-  </p:cSld>
-  <p:clrMapOvr>
-    <a:masterClrMapping/>
-  </p:clrMapOvr>
-</p:notes>
-</file>
-
-<file path=ppt/notesSlides/notesSlide6.xml><?xml version="1.0" encoding="utf-8"?>
-<p:notes xmlns:a="http://schemas.openxmlformats.org/drawingml/2006/main" xmlns:p="http://schemas.openxmlformats.org/presentationml/2006/main" xmlns:r="http://schemas.openxmlformats.org/officeDocument/2006/relationships">
-  <p:cSld>
-    <p:spTree>
-      <p:nvGrpSpPr>
-        <p:cNvPr id="1" name=""/>
-        <p:cNvGrpSpPr/>
-        <p:nvPr/>
-      </p:nvGrpSpPr>
-      <p:grpSpPr>
-        <a:xfrm>
-          <a:off x="0" y="0"/>
-          <a:ext cx="0" cy="0"/>
-          <a:chOff x="0" y="0"/>
-          <a:chExt cx="0" cy="0"/>
-        </a:xfrm>
-      </p:grpSpPr>
-      <p:sp>
-        <p:nvSpPr>
-          <p:cNvPr id="2" name="Slide Image Placeholder 1"/>
-          <p:cNvSpPr>
-            <a:spLocks noGrp="1"/>
-          </p:cNvSpPr>
-          <p:nvPr>
-            <p:ph type="sldImg" idx="2"/>
-          </p:nvPr>
-        </p:nvSpPr>
-        <p:spPr/>
-      </p:sp>
-      <p:sp>
-        <p:nvSpPr>
-          <p:cNvPr id="3" name="Notes Placeholder 2"/>
-          <p:cNvSpPr>
-            <a:spLocks noGrp="1"/>
-          </p:cNvSpPr>
-          <p:nvPr>
-            <p:ph type="body" idx="3" sz="quarter"/>
-          </p:nvPr>
-        </p:nvSpPr>
-        <p:spPr/>
-        <p:txBody>
-          <a:bodyPr/>
-          <a:lstStyle/>
-          <a:p>
-            <a:r>
-              <a:t>Buscar: «correlación no implica causalidad» · «falacia post hoc ejemplos» · «Los Simpson piedra que ahuyenta tigres»</a:t>
-            </a:r>
-          </a:p>
-        </p:txBody>
-      </p:sp>
-      <p:sp>
-        <p:nvSpPr>
-          <p:cNvPr id="4" name="Slide Number Placeholder 3"/>
-          <p:cNvSpPr>
-            <a:spLocks noGrp="1"/>
-          </p:cNvSpPr>
-          <p:nvPr>
-            <p:ph type="sldNum" idx="5" sz="quarter"/>
-          </p:nvPr>
-        </p:nvSpPr>
-        <p:spPr/>
-      </p:sp>
-    </p:spTree>
-  </p:cSld>
-  <p:clrMapOvr>
-    <a:masterClrMapping/>
-  </p:clrMapOvr>
-</p:notes>
 </file>
 
 <file path=ppt/slideLayouts/slideLayout1.xml><?xml version="1.0" encoding="utf-8"?>

--- a/curso/pptx/S22.pptx
+++ b/curso/pptx/S22.pptx
@@ -3800,7 +3800,7 @@
                 </a:solidFill>
                 <a:latin typeface="Nunito Sans"/>
               </a:rPr>
-              <a:t>Noticia inventada: «Los alumnos que desayunan en casa sacan mejores notas». Iker concluye: «El desayuno te hace más listo».</a:t>
+              <a:t>Noticia inventada: «Los alumnos que desayunan en casa sacan mejores notas». Un chico concluye: «El desayuno te hace más listo».</a:t>
             </a:r>
           </a:p>
         </p:txBody>
@@ -4109,7 +4109,7 @@
                 </a:solidFill>
                 <a:latin typeface="Nunito Sans"/>
               </a:rPr>
-              <a:t>Maialen deja las bebidas energéticas por la tarde y durante tres semanas se duerme antes. Vuelve a tomarlas y vuelve a dormir mal.</a:t>
+              <a:t>Una chica deja las bebidas energéticas por la tarde y durante tres semanas se duerme antes. Vuelve a tomarlas y vuelve a dormir mal.</a:t>
             </a:r>
           </a:p>
         </p:txBody>
@@ -4751,7 +4751,7 @@
                 </a:solidFill>
                 <a:latin typeface="Nunito Sans"/>
               </a:rPr>
-              <a:t>Chen come gambas por primera vez. A los diez minutos se le hinchan los labios y le pica la piel. Su madre: «Han sido las gambas».</a:t>
+              <a:t>Un chico come gambas por primera vez. A los diez minutos se le hinchan los labios y le pica la piel. Su madre: «Han sido las gambas».</a:t>
             </a:r>
           </a:p>
         </p:txBody>

--- a/curso/pptx/S22.pptx
+++ b/curso/pptx/S22.pptx
@@ -23,6 +23,7 @@
     <p:sldId id="271" r:id="rId23"/>
     <p:sldId id="272" r:id="rId24"/>
     <p:sldId id="273" r:id="rId25"/>
+    <p:sldId id="274" r:id="rId26"/>
   </p:sldIdLst>
   <p:sldSz cx="12192000" cy="6858000" type="screen4x3"/>
   <p:notesSz cx="6858000" cy="9144000"/>
@@ -3536,7 +3537,7 @@
                 </a:solidFill>
                 <a:latin typeface="Nunito Sans"/>
               </a:rPr>
-              <a:t>PENSAMIENTO CRÍTICO · SESIÓN 22 · UNIDAD 4 · FALACIAS II: RAZONAR MAL</a:t>
+              <a:t>PENSAMIENTO CRÍTICO · SESIÓN 22 · UNIDAD 4 · FALACIAS I: ATACAR, DESVIAR, EMOCIONAR</a:t>
             </a:r>
           </a:p>
         </p:txBody>
@@ -3575,7 +3576,7 @@
                 </a:solidFill>
                 <a:latin typeface="Fredoka"/>
               </a:rPr>
-              <a:t>Causa falsa</a:t>
+              <a:t>Apelar a las emociones</a:t>
             </a:r>
           </a:p>
         </p:txBody>
@@ -3614,7 +3615,7 @@
                 </a:solidFill>
                 <a:latin typeface="Nunito Sans"/>
               </a:rPr>
-              <a:t>Que una cosa pase después de otra, o a la vez, no basta para saber que la primera sea su causa.</a:t>
+              <a:t>Las emociones importan y a veces son razones; la falacia es asustar o dar pena en lugar de dar razones.</a:t>
             </a:r>
           </a:p>
         </p:txBody>
@@ -3718,7 +3719,7 @@
                 </a:solidFill>
                 <a:latin typeface="Fredoka"/>
               </a:rPr>
-              <a:t>Caso 2 · El desayuno</a:t>
+              <a:t>Caso 1 · La cadena de WhatsApp</a:t>
             </a:r>
           </a:p>
         </p:txBody>
@@ -3800,7 +3801,7 @@
                 </a:solidFill>
                 <a:latin typeface="Nunito Sans"/>
               </a:rPr>
-              <a:t>Noticia inventada: «Los alumnos que desayunan en casa sacan mejores notas». Un chico concluye: «El desayuno te hace más listo».</a:t>
+              <a:t>«Si no reenvías este mensaje a diez contactos antes de medianoche, tu cuenta de WhatsApp se borrará.»</a:t>
             </a:r>
           </a:p>
         </p:txBody>
@@ -3848,7 +3849,7 @@
                 </a:solidFill>
                 <a:latin typeface="Nunito Sans"/>
               </a:rPr>
-              <a:t>¿Van juntas? Sí: desayunar en casa y sacar buenas notas.</a:t>
+              <a:t>¿Qué me piden? Reenviar el mensaje.</a:t>
             </a:r>
           </a:p>
           <a:p>
@@ -3873,7 +3874,7 @@
                 </a:solidFill>
                 <a:latin typeface="Nunito Sans"/>
               </a:rPr>
-              <a:t>¿Puede haber una tercera causa? Sí: dormir bien, tener horarios, tener ayuda en casa.</a:t>
+              <a:t>¿Qué razón dan? Un miedo: perder la cuenta.</a:t>
             </a:r>
           </a:p>
           <a:p>
@@ -3898,7 +3899,7 @@
                 </a:solidFill>
                 <a:latin typeface="Nunito Sans"/>
               </a:rPr>
-              <a:t>El desayuno puede ayudar, pero el dato solo dice que van juntas.</a:t>
+              <a:t>¿Qué pruebas hay? Ninguna. WhatsApp no borra cuentas por no reenviar cadenas.</a:t>
             </a:r>
           </a:p>
           <a:p>
@@ -3923,7 +3924,7 @@
                 </a:solidFill>
                 <a:latin typeface="Nunito Sans"/>
               </a:rPr>
-              <a:t>Conclusión: que vayan juntas no basta. Hace falta más para saber qué causa qué.</a:t>
+              <a:t>Conclusión: apelación al miedo. Si quito el miedo, no queda ninguna razón.</a:t>
             </a:r>
           </a:p>
         </p:txBody>
@@ -4027,7 +4028,7 @@
                 </a:solidFill>
                 <a:latin typeface="Fredoka"/>
               </a:rPr>
-              <a:t>Caso 3 · Una causa bien buscada</a:t>
+              <a:t>Caso 2 · El parte</a:t>
             </a:r>
           </a:p>
         </p:txBody>
@@ -4109,7 +4110,7 @@
                 </a:solidFill>
                 <a:latin typeface="Nunito Sans"/>
               </a:rPr>
-              <a:t>Una chica deja las bebidas energéticas por la tarde y durante tres semanas se duerme antes. Vuelve a tomarlas y vuelve a dormir mal.</a:t>
+              <a:t>Un chico, al profesor: «No me pongas el parte por usar el móvil en clase. Mi madre me castigará sin ir al partido del Athletic».</a:t>
             </a:r>
           </a:p>
         </p:txBody>
@@ -4157,7 +4158,7 @@
                 </a:solidFill>
                 <a:latin typeface="Nunito Sans"/>
               </a:rPr>
-              <a:t>¿Pasa una sola vez? No: lo ha visto varias semanas.</a:t>
+              <a:t>¿Qué se discute? Si usar el móvil en clase merece el parte.</a:t>
             </a:r>
           </a:p>
           <a:p>
@@ -4182,7 +4183,7 @@
                 </a:solidFill>
                 <a:latin typeface="Nunito Sans"/>
               </a:rPr>
-              <a:t>¿Ha quitado y puesto la causa? Sí, y el efecto cambia con ella.</a:t>
+              <a:t>¿Qué razón da el chico? Que el castigo le dará mucha pena.</a:t>
             </a:r>
           </a:p>
           <a:p>
@@ -4207,7 +4208,7 @@
                 </a:solidFill>
                 <a:latin typeface="Nunito Sans"/>
               </a:rPr>
-              <a:t>¿Hay una explicación? Sí: llevan cafeína, y la cafeína quita el sueño.</a:t>
+              <a:t>Si quito la pena, ¿qué queda? Nada sobre si usó el móvil.</a:t>
             </a:r>
           </a:p>
           <a:p>
@@ -4232,7 +4233,7 @@
                 </a:solidFill>
                 <a:latin typeface="Nunito Sans"/>
               </a:rPr>
-              <a:t>Conclusión: no es falacia. Una causa de verdad se comprueba varias veces y se explica.</a:t>
+              <a:t>Conclusión: apelación a la pena. Su tristeza puede ser real, pero no viene a cuento.</a:t>
             </a:r>
           </a:p>
         </p:txBody>
@@ -4246,6 +4247,315 @@
 </file>
 
 <file path=ppt/slides/slide12.xml><?xml version="1.0" encoding="utf-8"?>
+<p:sld xmlns:a="http://schemas.openxmlformats.org/drawingml/2006/main" xmlns:p="http://schemas.openxmlformats.org/presentationml/2006/main" xmlns:r="http://schemas.openxmlformats.org/officeDocument/2006/relationships">
+  <p:cSld>
+    <p:bg>
+      <p:bgPr>
+        <a:solidFill>
+          <a:srgbClr val="FBF7EF"/>
+        </a:solidFill>
+        <a:effectLst/>
+      </p:bgPr>
+    </p:bg>
+    <p:spTree>
+      <p:nvGrpSpPr>
+        <p:cNvPr id="1" name=""/>
+        <p:cNvGrpSpPr/>
+        <p:nvPr/>
+      </p:nvGrpSpPr>
+      <p:grpSpPr/>
+      <p:sp>
+        <p:nvSpPr>
+          <p:cNvPr id="2" name="TextBox 1"/>
+          <p:cNvSpPr txBox="1"/>
+          <p:nvPr/>
+        </p:nvSpPr>
+        <p:spPr>
+          <a:xfrm>
+            <a:off x="640000" y="380000"/>
+            <a:ext cx="10912000" cy="420000"/>
+          </a:xfrm>
+          <a:prstGeom prst="rect">
+            <a:avLst/>
+          </a:prstGeom>
+          <a:noFill/>
+        </p:spPr>
+        <p:txBody>
+          <a:bodyPr wrap="square">
+            <a:spAutoFit/>
+          </a:bodyPr>
+          <a:lstStyle/>
+          <a:p>
+            <a:pPr>
+              <a:spcAft>
+                <a:spcPts val="630"/>
+              </a:spcAft>
+            </a:pPr>
+            <a:r>
+              <a:rPr sz="1400" b="1">
+                <a:solidFill>
+                  <a:srgbClr val="E8793A"/>
+                </a:solidFill>
+                <a:latin typeface="Nunito Sans"/>
+              </a:rPr>
+              <a:t>BLOQUE 2 · CASOS RESUELTOS</a:t>
+            </a:r>
+          </a:p>
+        </p:txBody>
+      </p:sp>
+      <p:sp>
+        <p:nvSpPr>
+          <p:cNvPr id="3" name="TextBox 2"/>
+          <p:cNvSpPr txBox="1"/>
+          <p:nvPr/>
+        </p:nvSpPr>
+        <p:spPr>
+          <a:xfrm>
+            <a:off x="640000" y="760000"/>
+            <a:ext cx="10912000" cy="800000"/>
+          </a:xfrm>
+          <a:prstGeom prst="rect">
+            <a:avLst/>
+          </a:prstGeom>
+          <a:noFill/>
+        </p:spPr>
+        <p:txBody>
+          <a:bodyPr wrap="square">
+            <a:spAutoFit/>
+          </a:bodyPr>
+          <a:lstStyle/>
+          <a:p>
+            <a:pPr>
+              <a:spcAft>
+                <a:spcPts val="1710"/>
+              </a:spcAft>
+            </a:pPr>
+            <a:r>
+              <a:rPr sz="3800" b="1">
+                <a:solidFill>
+                  <a:srgbClr val="1F2A44"/>
+                </a:solidFill>
+                <a:latin typeface="Fredoka"/>
+              </a:rPr>
+              <a:t>Caso 3 · Un miedo con razones</a:t>
+            </a:r>
+          </a:p>
+        </p:txBody>
+      </p:sp>
+      <p:sp>
+        <p:nvSpPr>
+          <p:cNvPr id="4" name="Rectangle 3"/>
+          <p:cNvSpPr/>
+          <p:nvPr/>
+        </p:nvSpPr>
+        <p:spPr>
+          <a:xfrm>
+            <a:off x="640000" y="1600000"/>
+            <a:ext cx="10912000" cy="1100000"/>
+          </a:xfrm>
+          <a:prstGeom prst="rect">
+            <a:avLst/>
+          </a:prstGeom>
+          <a:solidFill>
+            <a:srgbClr val="FFFFFF"/>
+          </a:solidFill>
+          <a:ln>
+            <a:noFill/>
+          </a:ln>
+        </p:spPr>
+        <p:style>
+          <a:lnRef idx="1">
+            <a:schemeClr val="accent1"/>
+          </a:lnRef>
+          <a:fillRef idx="3">
+            <a:schemeClr val="accent1"/>
+          </a:fillRef>
+          <a:effectRef idx="2">
+            <a:schemeClr val="accent1"/>
+          </a:effectRef>
+          <a:fontRef idx="minor">
+            <a:schemeClr val="lt1"/>
+          </a:fontRef>
+        </p:style>
+        <p:txBody>
+          <a:bodyPr rtlCol="0" anchor="ctr"/>
+          <a:lstStyle/>
+          <a:p>
+            <a:pPr algn="ctr"/>
+          </a:p>
+        </p:txBody>
+      </p:sp>
+      <p:sp>
+        <p:nvSpPr>
+          <p:cNvPr id="5" name="TextBox 4"/>
+          <p:cNvSpPr txBox="1"/>
+          <p:nvPr/>
+        </p:nvSpPr>
+        <p:spPr>
+          <a:xfrm>
+            <a:off x="840000" y="1650000"/>
+            <a:ext cx="10512000" cy="1000000"/>
+          </a:xfrm>
+          <a:prstGeom prst="rect">
+            <a:avLst/>
+          </a:prstGeom>
+          <a:noFill/>
+        </p:spPr>
+        <p:txBody>
+          <a:bodyPr wrap="square" anchor="ctr">
+            <a:spAutoFit/>
+          </a:bodyPr>
+          <a:lstStyle/>
+          <a:p>
+            <a:pPr>
+              <a:spcAft>
+                <a:spcPts val="1170"/>
+              </a:spcAft>
+            </a:pPr>
+            <a:r>
+              <a:rPr sz="2600" b="1">
+                <a:solidFill>
+                  <a:srgbClr val="1F2A44"/>
+                </a:solidFill>
+                <a:latin typeface="Nunito Sans"/>
+              </a:rPr>
+              <a:t>Cartel de una escuela de bici: «Lleva casco. En una caída, protege la cabeza. Lo dicen los médicos de urgencias».</a:t>
+            </a:r>
+          </a:p>
+        </p:txBody>
+      </p:sp>
+      <p:sp>
+        <p:nvSpPr>
+          <p:cNvPr id="6" name="TextBox 5"/>
+          <p:cNvSpPr txBox="1"/>
+          <p:nvPr/>
+        </p:nvSpPr>
+        <p:spPr>
+          <a:xfrm>
+            <a:off x="640000" y="2900000"/>
+            <a:ext cx="10912000" cy="3500000"/>
+          </a:xfrm>
+          <a:prstGeom prst="rect">
+            <a:avLst/>
+          </a:prstGeom>
+          <a:noFill/>
+        </p:spPr>
+        <p:txBody>
+          <a:bodyPr wrap="square">
+            <a:spAutoFit/>
+          </a:bodyPr>
+          <a:lstStyle/>
+          <a:p>
+            <a:pPr>
+              <a:spcAft>
+                <a:spcPts val="1080"/>
+              </a:spcAft>
+            </a:pPr>
+            <a:r>
+              <a:rPr sz="2400" b="1">
+                <a:solidFill>
+                  <a:srgbClr val="E8793A"/>
+                </a:solidFill>
+                <a:latin typeface="Nunito Sans"/>
+              </a:rPr>
+              <a:t>1. </a:t>
+            </a:r>
+            <a:r>
+              <a:rPr sz="2400" b="0">
+                <a:solidFill>
+                  <a:srgbClr val="1F2A44"/>
+                </a:solidFill>
+                <a:latin typeface="Nunito Sans"/>
+              </a:rPr>
+              <a:t>¿Da miedo? Sí: habla de caídas.</a:t>
+            </a:r>
+          </a:p>
+          <a:p>
+            <a:pPr>
+              <a:spcAft>
+                <a:spcPts val="1080"/>
+              </a:spcAft>
+            </a:pPr>
+            <a:r>
+              <a:rPr sz="2400" b="1">
+                <a:solidFill>
+                  <a:srgbClr val="E8793A"/>
+                </a:solidFill>
+                <a:latin typeface="Nunito Sans"/>
+              </a:rPr>
+              <a:t>2. </a:t>
+            </a:r>
+            <a:r>
+              <a:rPr sz="2400" b="0">
+                <a:solidFill>
+                  <a:srgbClr val="1F2A44"/>
+                </a:solidFill>
+                <a:latin typeface="Nunito Sans"/>
+              </a:rPr>
+              <a:t>¿El peligro es real? Sí: en bici hay caídas.</a:t>
+            </a:r>
+          </a:p>
+          <a:p>
+            <a:pPr>
+              <a:spcAft>
+                <a:spcPts val="1080"/>
+              </a:spcAft>
+            </a:pPr>
+            <a:r>
+              <a:rPr sz="2400" b="1">
+                <a:solidFill>
+                  <a:srgbClr val="E8793A"/>
+                </a:solidFill>
+                <a:latin typeface="Nunito Sans"/>
+              </a:rPr>
+              <a:t>3. </a:t>
+            </a:r>
+            <a:r>
+              <a:rPr sz="2400" b="0">
+                <a:solidFill>
+                  <a:srgbClr val="1F2A44"/>
+                </a:solidFill>
+                <a:latin typeface="Nunito Sans"/>
+              </a:rPr>
+              <a:t>¿Hay razones? Sí: explica cómo protege el casco y quién lo dice.</a:t>
+            </a:r>
+          </a:p>
+          <a:p>
+            <a:pPr>
+              <a:spcAft>
+                <a:spcPts val="1080"/>
+              </a:spcAft>
+            </a:pPr>
+            <a:r>
+              <a:rPr sz="2400" b="1">
+                <a:solidFill>
+                  <a:srgbClr val="E8793A"/>
+                </a:solidFill>
+                <a:latin typeface="Nunito Sans"/>
+              </a:rPr>
+              <a:t>4. </a:t>
+            </a:r>
+            <a:r>
+              <a:rPr sz="2400" b="0">
+                <a:solidFill>
+                  <a:srgbClr val="1F2A44"/>
+                </a:solidFill>
+                <a:latin typeface="Nunito Sans"/>
+              </a:rPr>
+              <a:t>Conclusión: no es falacia. Avisar de un peligro real, con razones, es legítimo.</a:t>
+            </a:r>
+          </a:p>
+        </p:txBody>
+      </p:sp>
+    </p:spTree>
+  </p:cSld>
+  <p:clrMapOvr>
+    <a:masterClrMapping/>
+  </p:clrMapOvr>
+</p:sld>
+</file>
+
+<file path=ppt/slides/slide13.xml><?xml version="1.0" encoding="utf-8"?>
 <p:sld xmlns:a="http://schemas.openxmlformats.org/drawingml/2006/main" xmlns:p="http://schemas.openxmlformats.org/presentationml/2006/main" xmlns:r="http://schemas.openxmlformats.org/officeDocument/2006/relationships">
   <p:cSld>
     <p:bg>
@@ -4336,7 +4646,7 @@
                 </a:solidFill>
                 <a:latin typeface="Fredoka"/>
               </a:rPr>
-              <a:t>Lo que olvida la causa falsa</a:t>
+              <a:t>Emoción con razones o en lugar de razones</a:t>
             </a:r>
           </a:p>
         </p:txBody>
@@ -4349,7 +4659,7 @@
 </p:sld>
 </file>
 
-<file path=ppt/slides/slide13.xml><?xml version="1.0" encoding="utf-8"?>
+<file path=ppt/slides/slide14.xml><?xml version="1.0" encoding="utf-8"?>
 <p:sld xmlns:a="http://schemas.openxmlformats.org/drawingml/2006/main" xmlns:p="http://schemas.openxmlformats.org/presentationml/2006/main" xmlns:r="http://schemas.openxmlformats.org/officeDocument/2006/relationships">
   <p:cSld>
     <p:bg>
@@ -4401,7 +4711,7 @@
                 </a:solidFill>
                 <a:latin typeface="Nunito Sans"/>
               </a:rPr>
-              <a:t>BLOQUE 3 · LO QUE OLVIDA LA CAUSA FALSA</a:t>
+              <a:t>BLOQUE 3 · EMOCIÓN CON RAZONES O EN LUGAR DE RAZONES</a:t>
             </a:r>
           </a:p>
         </p:txBody>
@@ -4440,21 +4750,64 @@
                 </a:solidFill>
                 <a:latin typeface="Fredoka"/>
               </a:rPr>
-              <a:t>Tres explicaciones que hay que mirar</a:t>
-            </a:r>
-          </a:p>
-        </p:txBody>
-      </p:sp>
-      <p:sp>
-        <p:nvSpPr>
-          <p:cNvPr id="4" name="TextBox 3"/>
+              <a:t>¿Cuándo es falacia?</a:t>
+            </a:r>
+          </a:p>
+        </p:txBody>
+      </p:sp>
+      <p:sp>
+        <p:nvSpPr>
+          <p:cNvPr id="4" name="Rectangle 3"/>
+          <p:cNvSpPr/>
+          <p:nvPr/>
+        </p:nvSpPr>
+        <p:spPr>
+          <a:xfrm>
+            <a:off x="640000" y="1650000"/>
+            <a:ext cx="5306000" cy="4400000"/>
+          </a:xfrm>
+          <a:prstGeom prst="rect">
+            <a:avLst/>
+          </a:prstGeom>
+          <a:solidFill>
+            <a:srgbClr val="FBE3D2"/>
+          </a:solidFill>
+          <a:ln>
+            <a:noFill/>
+          </a:ln>
+        </p:spPr>
+        <p:style>
+          <a:lnRef idx="1">
+            <a:schemeClr val="accent1"/>
+          </a:lnRef>
+          <a:fillRef idx="3">
+            <a:schemeClr val="accent1"/>
+          </a:fillRef>
+          <a:effectRef idx="2">
+            <a:schemeClr val="accent1"/>
+          </a:effectRef>
+          <a:fontRef idx="minor">
+            <a:schemeClr val="lt1"/>
+          </a:fontRef>
+        </p:style>
+        <p:txBody>
+          <a:bodyPr rtlCol="0" anchor="ctr"/>
+          <a:lstStyle/>
+          <a:p>
+            <a:pPr algn="ctr"/>
+          </a:p>
+        </p:txBody>
+      </p:sp>
+      <p:sp>
+        <p:nvSpPr>
+          <p:cNvPr id="5" name="TextBox 4"/>
           <p:cNvSpPr txBox="1"/>
           <p:nvPr/>
         </p:nvSpPr>
         <p:spPr>
           <a:xfrm>
-            <a:off x="640000" y="1650000"/>
-            <a:ext cx="10912000" cy="4808000"/>
+            <a:off x="840000" y="1750000"/>
+            <a:ext cx="4906000" cy="600000"/>
           </a:xfrm>
           <a:prstGeom prst="rect">
             <a:avLst/>
@@ -4475,6 +4828,45 @@
             <a:r>
               <a:rPr sz="2800" b="1">
                 <a:solidFill>
+                  <a:srgbClr val="C2531C"/>
+                </a:solidFill>
+                <a:latin typeface="Nunito Sans"/>
+              </a:rPr>
+              <a:t>Falacia</a:t>
+            </a:r>
+          </a:p>
+        </p:txBody>
+      </p:sp>
+      <p:sp>
+        <p:nvSpPr>
+          <p:cNvPr id="6" name="TextBox 5"/>
+          <p:cNvSpPr txBox="1"/>
+          <p:nvPr/>
+        </p:nvSpPr>
+        <p:spPr>
+          <a:xfrm>
+            <a:off x="840000" y="2400000"/>
+            <a:ext cx="4906000" cy="3500000"/>
+          </a:xfrm>
+          <a:prstGeom prst="rect">
+            <a:avLst/>
+          </a:prstGeom>
+          <a:noFill/>
+        </p:spPr>
+        <p:txBody>
+          <a:bodyPr wrap="square">
+            <a:spAutoFit/>
+          </a:bodyPr>
+          <a:lstStyle/>
+          <a:p>
+            <a:pPr>
+              <a:spcAft>
+                <a:spcPts val="1170"/>
+              </a:spcAft>
+            </a:pPr>
+            <a:r>
+              <a:rPr sz="2600" b="1">
+                <a:solidFill>
                   <a:srgbClr val="E8793A"/>
                 </a:solidFill>
                 <a:latin typeface="Nunito Sans"/>
@@ -4482,32 +4874,239 @@
               <a:t>• </a:t>
             </a:r>
             <a:r>
+              <a:rPr sz="2600" b="0">
+                <a:solidFill>
+                  <a:srgbClr val="1F2A44"/>
+                </a:solidFill>
+                <a:latin typeface="Nunito Sans"/>
+              </a:rPr>
+              <a:t>El miedo, la pena o la culpa </a:t>
+            </a:r>
+            <a:r>
+              <a:rPr sz="2600" b="1">
+                <a:solidFill>
+                  <a:srgbClr val="1F2A44"/>
+                </a:solidFill>
+                <a:latin typeface="Nunito Sans"/>
+              </a:rPr>
+              <a:t>sustituyen</a:t>
+            </a:r>
+            <a:r>
+              <a:rPr sz="2600" b="0">
+                <a:solidFill>
+                  <a:srgbClr val="1F2A44"/>
+                </a:solidFill>
+                <a:latin typeface="Nunito Sans"/>
+              </a:rPr>
+              <a:t> a las razones</a:t>
+            </a:r>
+          </a:p>
+          <a:p>
+            <a:pPr>
+              <a:spcAft>
+                <a:spcPts val="1170"/>
+              </a:spcAft>
+            </a:pPr>
+            <a:r>
+              <a:rPr sz="2600" b="1">
+                <a:solidFill>
+                  <a:srgbClr val="E8793A"/>
+                </a:solidFill>
+                <a:latin typeface="Nunito Sans"/>
+              </a:rPr>
+              <a:t>• </a:t>
+            </a:r>
+            <a:r>
+              <a:rPr sz="2600" b="0">
+                <a:solidFill>
+                  <a:srgbClr val="1F2A44"/>
+                </a:solidFill>
+                <a:latin typeface="Nunito Sans"/>
+              </a:rPr>
+              <a:t>El peligro no se demuestra</a:t>
+            </a:r>
+          </a:p>
+          <a:p>
+            <a:pPr>
+              <a:spcAft>
+                <a:spcPts val="1170"/>
+              </a:spcAft>
+            </a:pPr>
+            <a:r>
+              <a:rPr sz="2600" b="1">
+                <a:solidFill>
+                  <a:srgbClr val="E8793A"/>
+                </a:solidFill>
+                <a:latin typeface="Nunito Sans"/>
+              </a:rPr>
+              <a:t>• </a:t>
+            </a:r>
+            <a:r>
+              <a:rPr sz="2600" b="0">
+                <a:solidFill>
+                  <a:srgbClr val="1F2A44"/>
+                </a:solidFill>
+                <a:latin typeface="Nunito Sans"/>
+              </a:rPr>
+              <a:t>Te meten prisa para que no pienses</a:t>
+            </a:r>
+          </a:p>
+        </p:txBody>
+      </p:sp>
+      <p:sp>
+        <p:nvSpPr>
+          <p:cNvPr id="7" name="Rectangle 6"/>
+          <p:cNvSpPr/>
+          <p:nvPr/>
+        </p:nvSpPr>
+        <p:spPr>
+          <a:xfrm>
+            <a:off x="6246000" y="1650000"/>
+            <a:ext cx="5306000" cy="4400000"/>
+          </a:xfrm>
+          <a:prstGeom prst="rect">
+            <a:avLst/>
+          </a:prstGeom>
+          <a:solidFill>
+            <a:srgbClr val="EAF0F7"/>
+          </a:solidFill>
+          <a:ln>
+            <a:noFill/>
+          </a:ln>
+        </p:spPr>
+        <p:style>
+          <a:lnRef idx="1">
+            <a:schemeClr val="accent1"/>
+          </a:lnRef>
+          <a:fillRef idx="3">
+            <a:schemeClr val="accent1"/>
+          </a:fillRef>
+          <a:effectRef idx="2">
+            <a:schemeClr val="accent1"/>
+          </a:effectRef>
+          <a:fontRef idx="minor">
+            <a:schemeClr val="lt1"/>
+          </a:fontRef>
+        </p:style>
+        <p:txBody>
+          <a:bodyPr rtlCol="0" anchor="ctr"/>
+          <a:lstStyle/>
+          <a:p>
+            <a:pPr algn="ctr"/>
+          </a:p>
+        </p:txBody>
+      </p:sp>
+      <p:sp>
+        <p:nvSpPr>
+          <p:cNvPr id="8" name="TextBox 7"/>
+          <p:cNvSpPr txBox="1"/>
+          <p:nvPr/>
+        </p:nvSpPr>
+        <p:spPr>
+          <a:xfrm>
+            <a:off x="6446000" y="1750000"/>
+            <a:ext cx="4906000" cy="600000"/>
+          </a:xfrm>
+          <a:prstGeom prst="rect">
+            <a:avLst/>
+          </a:prstGeom>
+          <a:noFill/>
+        </p:spPr>
+        <p:txBody>
+          <a:bodyPr wrap="square">
+            <a:spAutoFit/>
+          </a:bodyPr>
+          <a:lstStyle/>
+          <a:p>
+            <a:pPr>
+              <a:spcAft>
+                <a:spcPts val="1260"/>
+              </a:spcAft>
+            </a:pPr>
+            <a:r>
               <a:rPr sz="2800" b="1">
                 <a:solidFill>
+                  <a:srgbClr val="2F6FB5"/>
+                </a:solidFill>
+                <a:latin typeface="Nunito Sans"/>
+              </a:rPr>
+              <a:t>Legítimo</a:t>
+            </a:r>
+          </a:p>
+        </p:txBody>
+      </p:sp>
+      <p:sp>
+        <p:nvSpPr>
+          <p:cNvPr id="9" name="TextBox 8"/>
+          <p:cNvSpPr txBox="1"/>
+          <p:nvPr/>
+        </p:nvSpPr>
+        <p:spPr>
+          <a:xfrm>
+            <a:off x="6446000" y="2400000"/>
+            <a:ext cx="4906000" cy="3500000"/>
+          </a:xfrm>
+          <a:prstGeom prst="rect">
+            <a:avLst/>
+          </a:prstGeom>
+          <a:noFill/>
+        </p:spPr>
+        <p:txBody>
+          <a:bodyPr wrap="square">
+            <a:spAutoFit/>
+          </a:bodyPr>
+          <a:lstStyle/>
+          <a:p>
+            <a:pPr>
+              <a:spcAft>
+                <a:spcPts val="1170"/>
+              </a:spcAft>
+            </a:pPr>
+            <a:r>
+              <a:rPr sz="2600" b="1">
+                <a:solidFill>
+                  <a:srgbClr val="E8793A"/>
+                </a:solidFill>
+                <a:latin typeface="Nunito Sans"/>
+              </a:rPr>
+              <a:t>• </a:t>
+            </a:r>
+            <a:r>
+              <a:rPr sz="2600" b="0">
+                <a:solidFill>
                   <a:srgbClr val="1F2A44"/>
                 </a:solidFill>
                 <a:latin typeface="Nunito Sans"/>
               </a:rPr>
-              <a:t>Casualidad:</a:t>
-            </a:r>
-            <a:r>
-              <a:rPr sz="2800" b="0">
+              <a:t>La emoción </a:t>
+            </a:r>
+            <a:r>
+              <a:rPr sz="2600" b="1">
                 <a:solidFill>
                   <a:srgbClr val="1F2A44"/>
                 </a:solidFill>
                 <a:latin typeface="Nunito Sans"/>
               </a:rPr>
-              <a:t> pasaron juntas por azar</a:t>
-            </a:r>
-          </a:p>
-          <a:p>
-            <a:pPr>
-              <a:spcAft>
-                <a:spcPts val="1260"/>
-              </a:spcAft>
-            </a:pPr>
-            <a:r>
-              <a:rPr sz="2800" b="1">
+              <a:t>acompaña</a:t>
+            </a:r>
+            <a:r>
+              <a:rPr sz="2600" b="0">
+                <a:solidFill>
+                  <a:srgbClr val="1F2A44"/>
+                </a:solidFill>
+                <a:latin typeface="Nunito Sans"/>
+              </a:rPr>
+              <a:t> a las razones</a:t>
+            </a:r>
+          </a:p>
+          <a:p>
+            <a:pPr>
+              <a:spcAft>
+                <a:spcPts val="1170"/>
+              </a:spcAft>
+            </a:pPr>
+            <a:r>
+              <a:rPr sz="2600" b="1">
                 <a:solidFill>
                   <a:srgbClr val="E8793A"/>
                 </a:solidFill>
@@ -4516,56 +5115,38 @@
               <a:t>• </a:t>
             </a:r>
             <a:r>
-              <a:rPr sz="2800" b="1">
+              <a:rPr sz="2600" b="0">
                 <a:solidFill>
                   <a:srgbClr val="1F2A44"/>
                 </a:solidFill>
                 <a:latin typeface="Nunito Sans"/>
               </a:rPr>
-              <a:t>Una tercera causa:</a:t>
-            </a:r>
-            <a:r>
-              <a:rPr sz="2800" b="0">
+              <a:t>El peligro es real y se explica</a:t>
+            </a:r>
+          </a:p>
+          <a:p>
+            <a:pPr>
+              <a:spcAft>
+                <a:spcPts val="1170"/>
+              </a:spcAft>
+            </a:pPr>
+            <a:r>
+              <a:rPr sz="2600" b="1">
+                <a:solidFill>
+                  <a:srgbClr val="E8793A"/>
+                </a:solidFill>
+                <a:latin typeface="Nunito Sans"/>
+              </a:rPr>
+              <a:t>• </a:t>
+            </a:r>
+            <a:r>
+              <a:rPr sz="2600" b="0">
                 <a:solidFill>
                   <a:srgbClr val="1F2A44"/>
                 </a:solidFill>
                 <a:latin typeface="Nunito Sans"/>
               </a:rPr>
-              <a:t> el calor sube los helados y las quemaduras</a:t>
-            </a:r>
-          </a:p>
-          <a:p>
-            <a:pPr>
-              <a:spcAft>
-                <a:spcPts val="1260"/>
-              </a:spcAft>
-            </a:pPr>
-            <a:r>
-              <a:rPr sz="2800" b="1">
-                <a:solidFill>
-                  <a:srgbClr val="E8793A"/>
-                </a:solidFill>
-                <a:latin typeface="Nunito Sans"/>
-              </a:rPr>
-              <a:t>• </a:t>
-            </a:r>
-            <a:r>
-              <a:rPr sz="2800" b="1">
-                <a:solidFill>
-                  <a:srgbClr val="1F2A44"/>
-                </a:solidFill>
-                <a:latin typeface="Nunito Sans"/>
-              </a:rPr>
-              <a:t>Al revés:</a:t>
-            </a:r>
-            <a:r>
-              <a:rPr sz="2800" b="0">
-                <a:solidFill>
-                  <a:srgbClr val="1F2A44"/>
-                </a:solidFill>
-                <a:latin typeface="Nunito Sans"/>
-              </a:rPr>
-              <a:t> quizá lo que parecía efecto es la causa</a:t>
+              <a:t>Puedes comprobarlo con calma</a:t>
             </a:r>
           </a:p>
         </p:txBody>
@@ -4578,7 +5159,7 @@
 </p:sld>
 </file>
 
-<file path=ppt/slides/slide14.xml><?xml version="1.0" encoding="utf-8"?>
+<file path=ppt/slides/slide15.xml><?xml version="1.0" encoding="utf-8"?>
 <p:sld xmlns:a="http://schemas.openxmlformats.org/drawingml/2006/main" xmlns:p="http://schemas.openxmlformats.org/presentationml/2006/main" xmlns:r="http://schemas.openxmlformats.org/officeDocument/2006/relationships">
   <p:cSld>
     <p:bg>
@@ -4630,7 +5211,7 @@
                 </a:solidFill>
                 <a:latin typeface="Nunito Sans"/>
               </a:rPr>
-              <a:t>CASO TRAMPA · BLOQUE 3 · LO QUE OLVIDA LA CAUSA FALSA</a:t>
+              <a:t>CASO TRAMPA · BLOQUE 3 · EMOCIÓN CON RAZONES O EN LUGAR DE RAZONES</a:t>
             </a:r>
           </a:p>
         </p:txBody>
@@ -4669,7 +5250,7 @@
                 </a:solidFill>
                 <a:latin typeface="Fredoka"/>
               </a:rPr>
-              <a:t>⚠ Las gambas</a:t>
+              <a:t>⚠ ¿Dar pena es siempre falacia?</a:t>
             </a:r>
           </a:p>
         </p:txBody>
@@ -4751,7 +5332,7 @@
                 </a:solidFill>
                 <a:latin typeface="Nunito Sans"/>
               </a:rPr>
-              <a:t>Un chico come gambas por primera vez. A los diez minutos se le hinchan los labios y le pica la piel. Su madre: «Han sido las gambas».</a:t>
+              <a:t>Cartel del instituto: «Recogemos comida para el banco de alimentos. Hay familias del barrio que no tienen suficiente para comer».</a:t>
             </a:r>
           </a:p>
         </p:txBody>
@@ -4799,7 +5380,7 @@
                 </a:solidFill>
                 <a:latin typeface="Nunito Sans"/>
               </a:rPr>
-              <a:t>Pasó después… ¿causa falsa? «Después de» no es «por culpa de».</a:t>
+              <a:t>Da pena. ¿Es una apelación a la pena?</a:t>
             </a:r>
           </a:p>
           <a:p>
@@ -4824,7 +5405,7 @@
                 </a:solidFill>
                 <a:latin typeface="Nunito Sans"/>
               </a:rPr>
-              <a:t>Tiene la forma «pasó después, así que fue la causa».</a:t>
+              <a:t>Sí, da pena: habla de familias que lo pasan mal.</a:t>
             </a:r>
           </a:p>
           <a:p>
@@ -4849,7 +5430,7 @@
                 </a:solidFill>
                 <a:latin typeface="Nunito Sans"/>
               </a:rPr>
-              <a:t>Pero hay una explicación conocida: la alergia a la comida da justo eso, y enseguida.</a:t>
+              <a:t>Pero ¿qué se pide? Ayudar. Y que alguien pase hambre es justo la razón para ayudar.</a:t>
             </a:r>
           </a:p>
           <a:p>
@@ -4874,7 +5455,7 @@
                 </a:solidFill>
                 <a:latin typeface="Nunito Sans"/>
               </a:rPr>
-              <a:t>Y se puede comprobar: en el médico hay pruebas de alergia.</a:t>
+              <a:t>Si quito la pena, ¿qué razón queda? Una necesidad real, que se puede comprobar.</a:t>
             </a:r>
           </a:p>
           <a:p>
@@ -4899,150 +5480,7 @@
                 </a:solidFill>
                 <a:latin typeface="Nunito Sans"/>
               </a:rPr>
-              <a:t>Conclusión: «después de» no basta, pero puede ser una buena pista. Es falacia solo si no miras nada más.</a:t>
-            </a:r>
-          </a:p>
-        </p:txBody>
-      </p:sp>
-    </p:spTree>
-  </p:cSld>
-  <p:clrMapOvr>
-    <a:masterClrMapping/>
-  </p:clrMapOvr>
-</p:sld>
-</file>
-
-<file path=ppt/slides/slide15.xml><?xml version="1.0" encoding="utf-8"?>
-<p:sld xmlns:a="http://schemas.openxmlformats.org/drawingml/2006/main" xmlns:p="http://schemas.openxmlformats.org/presentationml/2006/main" xmlns:r="http://schemas.openxmlformats.org/officeDocument/2006/relationships">
-  <p:cSld>
-    <p:bg>
-      <p:bgPr>
-        <a:solidFill>
-          <a:srgbClr val="FBF7EF"/>
-        </a:solidFill>
-        <a:effectLst/>
-      </p:bgPr>
-    </p:bg>
-    <p:spTree>
-      <p:nvGrpSpPr>
-        <p:cNvPr id="1" name=""/>
-        <p:cNvGrpSpPr/>
-        <p:nvPr/>
-      </p:nvGrpSpPr>
-      <p:grpSpPr/>
-      <p:sp>
-        <p:nvSpPr>
-          <p:cNvPr id="2" name="TextBox 1"/>
-          <p:cNvSpPr txBox="1"/>
-          <p:nvPr/>
-        </p:nvSpPr>
-        <p:spPr>
-          <a:xfrm>
-            <a:off x="640000" y="380000"/>
-            <a:ext cx="10912000" cy="420000"/>
-          </a:xfrm>
-          <a:prstGeom prst="rect">
-            <a:avLst/>
-          </a:prstGeom>
-          <a:noFill/>
-        </p:spPr>
-        <p:txBody>
-          <a:bodyPr wrap="square">
-            <a:spAutoFit/>
-          </a:bodyPr>
-          <a:lstStyle/>
-          <a:p>
-            <a:pPr>
-              <a:spcAft>
-                <a:spcPts val="630"/>
-              </a:spcAft>
-            </a:pPr>
-            <a:r>
-              <a:rPr sz="1400" b="1">
-                <a:solidFill>
-                  <a:srgbClr val="E8793A"/>
-                </a:solidFill>
-                <a:latin typeface="Nunito Sans"/>
-              </a:rPr>
-              <a:t>LO DE HOY EN TRES LÍNEAS</a:t>
-            </a:r>
-          </a:p>
-        </p:txBody>
-      </p:sp>
-      <p:sp>
-        <p:nvSpPr>
-          <p:cNvPr id="3" name="TextBox 2"/>
-          <p:cNvSpPr txBox="1"/>
-          <p:nvPr/>
-        </p:nvSpPr>
-        <p:spPr>
-          <a:xfrm>
-            <a:off x="640000" y="760000"/>
-            <a:ext cx="10912000" cy="800000"/>
-          </a:xfrm>
-          <a:prstGeom prst="rect">
-            <a:avLst/>
-          </a:prstGeom>
-          <a:noFill/>
-        </p:spPr>
-        <p:txBody>
-          <a:bodyPr wrap="square">
-            <a:spAutoFit/>
-          </a:bodyPr>
-          <a:lstStyle/>
-          <a:p>
-            <a:pPr>
-              <a:spcAft>
-                <a:spcPts val="1710"/>
-              </a:spcAft>
-            </a:pPr>
-            <a:r>
-              <a:rPr sz="3800" b="1">
-                <a:solidFill>
-                  <a:srgbClr val="1F2A44"/>
-                </a:solidFill>
-                <a:latin typeface="Fredoka"/>
-              </a:rPr>
-              <a:t>Escríbelo tú primero, sin mirar</a:t>
-            </a:r>
-          </a:p>
-        </p:txBody>
-      </p:sp>
-      <p:sp>
-        <p:nvSpPr>
-          <p:cNvPr id="4" name="TextBox 3"/>
-          <p:cNvSpPr txBox="1"/>
-          <p:nvPr/>
-        </p:nvSpPr>
-        <p:spPr>
-          <a:xfrm>
-            <a:off x="640000" y="1800000"/>
-            <a:ext cx="10912000" cy="1500000"/>
-          </a:xfrm>
-          <a:prstGeom prst="rect">
-            <a:avLst/>
-          </a:prstGeom>
-          <a:noFill/>
-        </p:spPr>
-        <p:txBody>
-          <a:bodyPr wrap="square">
-            <a:spAutoFit/>
-          </a:bodyPr>
-          <a:lstStyle/>
-          <a:p>
-            <a:pPr>
-              <a:spcAft>
-                <a:spcPts val="1170"/>
-              </a:spcAft>
-            </a:pPr>
-            <a:r>
-              <a:rPr sz="2600" b="0">
-                <a:solidFill>
-                  <a:srgbClr val="4A5568"/>
-                </a:solidFill>
-                <a:latin typeface="Nunito Sans"/>
-              </a:rPr>
-              <a:t>Dos minutos. Después lo comparamos.</a:t>
+              <a:t>Conclusión: no es falacia. La emoción acompaña a una razón que viene a cuento.</a:t>
             </a:r>
           </a:p>
         </p:txBody>
@@ -5120,8 +5558,8 @@
         </p:nvSpPr>
         <p:spPr>
           <a:xfrm>
-            <a:off x="640000" y="1300000"/>
-            <a:ext cx="10912000" cy="4800000"/>
+            <a:off x="640000" y="760000"/>
+            <a:ext cx="10912000" cy="800000"/>
           </a:xfrm>
           <a:prstGeom prst="rect">
             <a:avLst/>
@@ -5136,76 +5574,56 @@
           <a:p>
             <a:pPr>
               <a:spcAft>
-                <a:spcPts val="1350"/>
-              </a:spcAft>
-            </a:pPr>
-            <a:r>
-              <a:rPr sz="3000" b="1">
-                <a:solidFill>
-                  <a:srgbClr val="E8793A"/>
-                </a:solidFill>
-                <a:latin typeface="Nunito Sans"/>
-              </a:rPr>
-              <a:t>1. </a:t>
-            </a:r>
-            <a:r>
-              <a:rPr sz="3000" b="0">
+                <a:spcPts val="1710"/>
+              </a:spcAft>
+            </a:pPr>
+            <a:r>
+              <a:rPr sz="3800" b="1">
                 <a:solidFill>
                   <a:srgbClr val="1F2A44"/>
                 </a:solidFill>
-                <a:latin typeface="Nunito Sans"/>
-              </a:rPr>
-              <a:t>La causa falsa cree que A causa B solo porque pasó antes o van juntas.</a:t>
-            </a:r>
-          </a:p>
-          <a:p>
-            <a:pPr>
-              <a:spcAft>
-                <a:spcPts val="1350"/>
-              </a:spcAft>
-            </a:pPr>
-            <a:r>
-              <a:rPr sz="3000" b="1">
-                <a:solidFill>
-                  <a:srgbClr val="E8793A"/>
-                </a:solidFill>
-                <a:latin typeface="Nunito Sans"/>
-              </a:rPr>
-              <a:t>2. </a:t>
-            </a:r>
-            <a:r>
-              <a:rPr sz="3000" b="0">
-                <a:solidFill>
-                  <a:srgbClr val="1F2A44"/>
-                </a:solidFill>
-                <a:latin typeface="Nunito Sans"/>
-              </a:rPr>
-              <a:t>«Después de» no es «por culpa de», y la correlación sola no demuestra la causa.</a:t>
-            </a:r>
-          </a:p>
-          <a:p>
-            <a:pPr>
-              <a:spcAft>
-                <a:spcPts val="1350"/>
-              </a:spcAft>
-            </a:pPr>
-            <a:r>
-              <a:rPr sz="3000" b="1">
-                <a:solidFill>
-                  <a:srgbClr val="E8793A"/>
-                </a:solidFill>
-                <a:latin typeface="Nunito Sans"/>
-              </a:rPr>
-              <a:t>3. </a:t>
-            </a:r>
-            <a:r>
-              <a:rPr sz="3000" b="0">
-                <a:solidFill>
-                  <a:srgbClr val="1F2A44"/>
-                </a:solidFill>
-                <a:latin typeface="Nunito Sans"/>
-              </a:rPr>
-              <a:t>Pregunta: ¿podría ser casualidad, una tercera causa o al revés?</a:t>
+                <a:latin typeface="Fredoka"/>
+              </a:rPr>
+              <a:t>Escríbelo tú primero, sin mirar</a:t>
+            </a:r>
+          </a:p>
+        </p:txBody>
+      </p:sp>
+      <p:sp>
+        <p:nvSpPr>
+          <p:cNvPr id="4" name="TextBox 3"/>
+          <p:cNvSpPr txBox="1"/>
+          <p:nvPr/>
+        </p:nvSpPr>
+        <p:spPr>
+          <a:xfrm>
+            <a:off x="640000" y="1800000"/>
+            <a:ext cx="10912000" cy="1500000"/>
+          </a:xfrm>
+          <a:prstGeom prst="rect">
+            <a:avLst/>
+          </a:prstGeom>
+          <a:noFill/>
+        </p:spPr>
+        <p:txBody>
+          <a:bodyPr wrap="square">
+            <a:spAutoFit/>
+          </a:bodyPr>
+          <a:lstStyle/>
+          <a:p>
+            <a:pPr>
+              <a:spcAft>
+                <a:spcPts val="1170"/>
+              </a:spcAft>
+            </a:pPr>
+            <a:r>
+              <a:rPr sz="2600" b="0">
+                <a:solidFill>
+                  <a:srgbClr val="4A5568"/>
+                </a:solidFill>
+                <a:latin typeface="Nunito Sans"/>
+              </a:rPr>
+              <a:t>Dos minutos. Después lo comparamos.</a:t>
             </a:r>
           </a:p>
         </p:txBody>
@@ -5224,7 +5642,7 @@
     <p:bg>
       <p:bgPr>
         <a:solidFill>
-          <a:srgbClr val="1F2A44"/>
+          <a:srgbClr val="FBF7EF"/>
         </a:solidFill>
         <a:effectLst/>
       </p:bgPr>
@@ -5266,11 +5684,11 @@
             <a:r>
               <a:rPr sz="1400" b="1">
                 <a:solidFill>
-                  <a:srgbClr val="F4B183"/>
-                </a:solidFill>
-                <a:latin typeface="Nunito Sans"/>
-              </a:rPr>
-              <a:t>VÍDEO</a:t>
+                  <a:srgbClr val="E8793A"/>
+                </a:solidFill>
+                <a:latin typeface="Nunito Sans"/>
+              </a:rPr>
+              <a:t>LO DE HOY EN TRES LÍNEAS</a:t>
             </a:r>
           </a:p>
         </p:txBody>
@@ -5283,8 +5701,8 @@
         </p:nvSpPr>
         <p:spPr>
           <a:xfrm>
-            <a:off x="640000" y="760000"/>
-            <a:ext cx="10912000" cy="800000"/>
+            <a:off x="640000" y="1300000"/>
+            <a:ext cx="10912000" cy="4800000"/>
           </a:xfrm>
           <a:prstGeom prst="rect">
             <a:avLst/>
@@ -5299,56 +5717,76 @@
           <a:p>
             <a:pPr>
               <a:spcAft>
-                <a:spcPts val="1620"/>
-              </a:spcAft>
-            </a:pPr>
-            <a:r>
-              <a:rPr sz="3600" b="1">
-                <a:solidFill>
-                  <a:srgbClr val="FBF7EF"/>
-                </a:solidFill>
-                <a:latin typeface="Fredoka"/>
-              </a:rPr>
-              <a:t>Correlación no implica causa, con ejemplos</a:t>
-            </a:r>
-          </a:p>
-        </p:txBody>
-      </p:sp>
-      <p:sp>
-        <p:nvSpPr>
-          <p:cNvPr id="4" name="TextBox 3"/>
-          <p:cNvSpPr txBox="1"/>
-          <p:nvPr/>
-        </p:nvSpPr>
-        <p:spPr>
-          <a:xfrm>
-            <a:off x="640000" y="2200000"/>
-            <a:ext cx="10912000" cy="2000000"/>
-          </a:xfrm>
-          <a:prstGeom prst="rect">
-            <a:avLst/>
-          </a:prstGeom>
-          <a:noFill/>
-        </p:spPr>
-        <p:txBody>
-          <a:bodyPr wrap="square">
-            <a:spAutoFit/>
-          </a:bodyPr>
-          <a:lstStyle/>
-          <a:p>
-            <a:pPr>
-              <a:spcAft>
-                <a:spcPts val="1080"/>
-              </a:spcAft>
-            </a:pPr>
-            <a:r>
-              <a:rPr sz="2400" b="0">
-                <a:solidFill>
-                  <a:srgbClr val="C9D3E6"/>
-                </a:solidFill>
-                <a:latin typeface="Nunito Sans"/>
-              </a:rPr>
-              <a:t>Ver ejemplos graciosos de cosas que van juntas sin causarse.</a:t>
+                <a:spcPts val="1350"/>
+              </a:spcAft>
+            </a:pPr>
+            <a:r>
+              <a:rPr sz="3000" b="1">
+                <a:solidFill>
+                  <a:srgbClr val="E8793A"/>
+                </a:solidFill>
+                <a:latin typeface="Nunito Sans"/>
+              </a:rPr>
+              <a:t>1. </a:t>
+            </a:r>
+            <a:r>
+              <a:rPr sz="3000" b="0">
+                <a:solidFill>
+                  <a:srgbClr val="1F2A44"/>
+                </a:solidFill>
+                <a:latin typeface="Nunito Sans"/>
+              </a:rPr>
+              <a:t>La apelación al miedo asusta en lugar de dar razones: el peligro no se demuestra.</a:t>
+            </a:r>
+          </a:p>
+          <a:p>
+            <a:pPr>
+              <a:spcAft>
+                <a:spcPts val="1350"/>
+              </a:spcAft>
+            </a:pPr>
+            <a:r>
+              <a:rPr sz="3000" b="1">
+                <a:solidFill>
+                  <a:srgbClr val="E8793A"/>
+                </a:solidFill>
+                <a:latin typeface="Nunito Sans"/>
+              </a:rPr>
+              <a:t>2. </a:t>
+            </a:r>
+            <a:r>
+              <a:rPr sz="3000" b="0">
+                <a:solidFill>
+                  <a:srgbClr val="1F2A44"/>
+                </a:solidFill>
+                <a:latin typeface="Nunito Sans"/>
+              </a:rPr>
+              <a:t>La apelación a la pena da pena en lugar de dar razones.</a:t>
+            </a:r>
+          </a:p>
+          <a:p>
+            <a:pPr>
+              <a:spcAft>
+                <a:spcPts val="1350"/>
+              </a:spcAft>
+            </a:pPr>
+            <a:r>
+              <a:rPr sz="3000" b="1">
+                <a:solidFill>
+                  <a:srgbClr val="E8793A"/>
+                </a:solidFill>
+                <a:latin typeface="Nunito Sans"/>
+              </a:rPr>
+              <a:t>3. </a:t>
+            </a:r>
+            <a:r>
+              <a:rPr sz="3000" b="0">
+                <a:solidFill>
+                  <a:srgbClr val="1F2A44"/>
+                </a:solidFill>
+                <a:latin typeface="Nunito Sans"/>
+              </a:rPr>
+              <a:t>Las emociones valen si acompañan a las razones, no si las sustituyen.</a:t>
             </a:r>
           </a:p>
         </p:txBody>
@@ -5413,6 +5851,149 @@
                 </a:solidFill>
                 <a:latin typeface="Nunito Sans"/>
               </a:rPr>
+              <a:t>VÍDEO</a:t>
+            </a:r>
+          </a:p>
+        </p:txBody>
+      </p:sp>
+      <p:sp>
+        <p:nvSpPr>
+          <p:cNvPr id="3" name="TextBox 2"/>
+          <p:cNvSpPr txBox="1"/>
+          <p:nvPr/>
+        </p:nvSpPr>
+        <p:spPr>
+          <a:xfrm>
+            <a:off x="640000" y="760000"/>
+            <a:ext cx="10912000" cy="800000"/>
+          </a:xfrm>
+          <a:prstGeom prst="rect">
+            <a:avLst/>
+          </a:prstGeom>
+          <a:noFill/>
+        </p:spPr>
+        <p:txBody>
+          <a:bodyPr wrap="square">
+            <a:spAutoFit/>
+          </a:bodyPr>
+          <a:lstStyle/>
+          <a:p>
+            <a:pPr>
+              <a:spcAft>
+                <a:spcPts val="1620"/>
+              </a:spcAft>
+            </a:pPr>
+            <a:r>
+              <a:rPr sz="3600" b="1">
+                <a:solidFill>
+                  <a:srgbClr val="FBF7EF"/>
+                </a:solidFill>
+                <a:latin typeface="Fredoka"/>
+              </a:rPr>
+              <a:t>Cadenas falsas de WhatsApp que meten miedo</a:t>
+            </a:r>
+          </a:p>
+        </p:txBody>
+      </p:sp>
+      <p:sp>
+        <p:nvSpPr>
+          <p:cNvPr id="4" name="TextBox 3"/>
+          <p:cNvSpPr txBox="1"/>
+          <p:nvPr/>
+        </p:nvSpPr>
+        <p:spPr>
+          <a:xfrm>
+            <a:off x="640000" y="2200000"/>
+            <a:ext cx="10912000" cy="2000000"/>
+          </a:xfrm>
+          <a:prstGeom prst="rect">
+            <a:avLst/>
+          </a:prstGeom>
+          <a:noFill/>
+        </p:spPr>
+        <p:txBody>
+          <a:bodyPr wrap="square">
+            <a:spAutoFit/>
+          </a:bodyPr>
+          <a:lstStyle/>
+          <a:p>
+            <a:pPr>
+              <a:spcAft>
+                <a:spcPts val="1080"/>
+              </a:spcAft>
+            </a:pPr>
+            <a:r>
+              <a:rPr sz="2400" b="0">
+                <a:solidFill>
+                  <a:srgbClr val="C9D3E6"/>
+                </a:solidFill>
+                <a:latin typeface="Nunito Sans"/>
+              </a:rPr>
+              <a:t>Reconocer el miedo como truco en mensajes que les llegan de verdad.</a:t>
+            </a:r>
+          </a:p>
+        </p:txBody>
+      </p:sp>
+    </p:spTree>
+  </p:cSld>
+  <p:clrMapOvr>
+    <a:masterClrMapping/>
+  </p:clrMapOvr>
+</p:sld>
+</file>
+
+<file path=ppt/slides/slide19.xml><?xml version="1.0" encoding="utf-8"?>
+<p:sld xmlns:a="http://schemas.openxmlformats.org/drawingml/2006/main" xmlns:p="http://schemas.openxmlformats.org/presentationml/2006/main" xmlns:r="http://schemas.openxmlformats.org/officeDocument/2006/relationships">
+  <p:cSld>
+    <p:bg>
+      <p:bgPr>
+        <a:solidFill>
+          <a:srgbClr val="1F2A44"/>
+        </a:solidFill>
+        <a:effectLst/>
+      </p:bgPr>
+    </p:bg>
+    <p:spTree>
+      <p:nvGrpSpPr>
+        <p:cNvPr id="1" name=""/>
+        <p:cNvGrpSpPr/>
+        <p:nvPr/>
+      </p:nvGrpSpPr>
+      <p:grpSpPr/>
+      <p:sp>
+        <p:nvSpPr>
+          <p:cNvPr id="2" name="TextBox 1"/>
+          <p:cNvSpPr txBox="1"/>
+          <p:nvPr/>
+        </p:nvSpPr>
+        <p:spPr>
+          <a:xfrm>
+            <a:off x="640000" y="380000"/>
+            <a:ext cx="10912000" cy="420000"/>
+          </a:xfrm>
+          <a:prstGeom prst="rect">
+            <a:avLst/>
+          </a:prstGeom>
+          <a:noFill/>
+        </p:spPr>
+        <p:txBody>
+          <a:bodyPr wrap="square">
+            <a:spAutoFit/>
+          </a:bodyPr>
+          <a:lstStyle/>
+          <a:p>
+            <a:pPr>
+              <a:spcAft>
+                <a:spcPts val="630"/>
+              </a:spcAft>
+            </a:pPr>
+            <a:r>
+              <a:rPr sz="1400" b="1">
+                <a:solidFill>
+                  <a:srgbClr val="F4B183"/>
+                </a:solidFill>
+                <a:latin typeface="Nunito Sans"/>
+              </a:rPr>
               <a:t>AHORA, LA HOJA DEL DÍA</a:t>
             </a:r>
           </a:p>
@@ -6006,7 +6587,7 @@
                 </a:solidFill>
                 <a:latin typeface="Nunito Sans"/>
               </a:rPr>
-              <a:t>La pendiente resbaladiza se parece a la apelación al ______: asusta con el final.  (sesión 21)</a:t>
+              <a:t>En un resumen justo, el otro diría: «sí, eso ______».  (sesión 21)</a:t>
             </a:r>
           </a:p>
           <a:p>
@@ -6031,7 +6612,7 @@
                 </a:solidFill>
                 <a:latin typeface="Nunito Sans"/>
               </a:rPr>
-              <a:t>La pendiente resbaladiza es como un ______: si te subes, no puedes parar.  (sesión 21)</a:t>
+              <a:t>Un muñeco de paja se parece a una persona, pero se ______ de un golpe.  (sesión 21)</a:t>
             </a:r>
           </a:p>
           <a:p>
@@ -6056,7 +6637,7 @@
                 </a:solidFill>
                 <a:latin typeface="Nunito Sans"/>
               </a:rPr>
-              <a:t>El ataque a la persona cambia el tema a la ______; la pista falsa cambia de tema del todo.  (sesión 17)</a:t>
+              <a:t>Un ______ es un caso que va en contra de una afirmación general.  (sesión 17)</a:t>
             </a:r>
           </a:p>
         </p:txBody>
@@ -6208,7 +6789,7 @@
                 </a:solidFill>
                 <a:latin typeface="Nunito Sans"/>
               </a:rPr>
-              <a:t>La pendiente resbaladiza se parece a la apelación al </a:t>
+              <a:t>En un resumen justo, el otro diría: «sí, eso </a:t>
             </a:r>
             <a:r>
               <a:rPr sz="2600" b="1">
@@ -6217,7 +6798,7 @@
                 </a:solidFill>
                 <a:latin typeface="Nunito Sans"/>
               </a:rPr>
-              <a:t>miedo</a:t>
+              <a:t>digo</a:t>
             </a:r>
             <a:r>
               <a:rPr sz="2600" b="0">
@@ -6226,7 +6807,7 @@
                 </a:solidFill>
                 <a:latin typeface="Nunito Sans"/>
               </a:rPr>
-              <a:t>: asusta con el final.  (sesión 21)</a:t>
+              <a:t>».  (sesión 21)</a:t>
             </a:r>
           </a:p>
           <a:p>
@@ -6251,7 +6832,7 @@
                 </a:solidFill>
                 <a:latin typeface="Nunito Sans"/>
               </a:rPr>
-              <a:t>La pendiente resbaladiza es como un </a:t>
+              <a:t>Un muñeco de paja se parece a una persona, pero se </a:t>
             </a:r>
             <a:r>
               <a:rPr sz="2600" b="1">
@@ -6260,7 +6841,7 @@
                 </a:solidFill>
                 <a:latin typeface="Nunito Sans"/>
               </a:rPr>
-              <a:t>tobogán</a:t>
+              <a:t>tumba</a:t>
             </a:r>
             <a:r>
               <a:rPr sz="2600" b="0">
@@ -6269,7 +6850,7 @@
                 </a:solidFill>
                 <a:latin typeface="Nunito Sans"/>
               </a:rPr>
-              <a:t>: si te subes, no puedes parar.  (sesión 21)</a:t>
+              <a:t> de un golpe.  (sesión 21)</a:t>
             </a:r>
           </a:p>
           <a:p>
@@ -6294,7 +6875,7 @@
                 </a:solidFill>
                 <a:latin typeface="Nunito Sans"/>
               </a:rPr>
-              <a:t>El ataque a la persona cambia el tema a la </a:t>
+              <a:t>Un </a:t>
             </a:r>
             <a:r>
               <a:rPr sz="2600" b="1">
@@ -6303,7 +6884,7 @@
                 </a:solidFill>
                 <a:latin typeface="Nunito Sans"/>
               </a:rPr>
-              <a:t>persona</a:t>
+              <a:t>contraejemplo</a:t>
             </a:r>
             <a:r>
               <a:rPr sz="2600" b="0">
@@ -6312,7 +6893,7 @@
                 </a:solidFill>
                 <a:latin typeface="Nunito Sans"/>
               </a:rPr>
-              <a:t>; la pista falsa cambia de tema del todo.  (sesión 17)</a:t>
+              <a:t> es un caso que va en contra de una afirmación general.  (sesión 17)</a:t>
             </a:r>
           </a:p>
         </p:txBody>
@@ -6459,7 +7040,7 @@
                 </a:solidFill>
                 <a:latin typeface="Nunito Sans"/>
               </a:rPr>
-              <a:t>«Desde que llevo la pulsera roja, el Athletic ha ganado tres partidos seguidos. Esta pulsera da suerte.»</a:t>
+              <a:t>«Si no reenvías este mensaje a diez contactos antes de medianoche, tu cuenta de WhatsApp se borrará.»</a:t>
             </a:r>
           </a:p>
         </p:txBody>
@@ -6498,7 +7079,7 @@
                 </a:solidFill>
                 <a:latin typeface="Nunito Sans"/>
               </a:rPr>
-              <a:t>¿Qué tiene que ver la pulsera con los goles?</a:t>
+              <a:t>¿Qué sientes al leerlo? ¿Te da alguna prueba?</a:t>
             </a:r>
           </a:p>
         </p:txBody>
@@ -6602,7 +7183,7 @@
                 </a:solidFill>
                 <a:latin typeface="Fredoka"/>
               </a:rPr>
-              <a:t>«Después de» no es «por culpa de»</a:t>
+              <a:t>Miedo, pena y culpa en lugar de razones</a:t>
             </a:r>
           </a:p>
         </p:txBody>
@@ -6667,7 +7248,7 @@
                 </a:solidFill>
                 <a:latin typeface="Nunito Sans"/>
               </a:rPr>
-              <a:t>BLOQUE 1 · «DESPUÉS DE» NO ES «POR CULPA DE»</a:t>
+              <a:t>BLOQUE 1 · MIEDO, PENA Y CULPA EN LUGAR DE RAZONES</a:t>
             </a:r>
           </a:p>
         </p:txBody>
@@ -6706,7 +7287,7 @@
                 </a:solidFill>
                 <a:latin typeface="Fredoka"/>
               </a:rPr>
-              <a:t>Causa falsa (post hoc)</a:t>
+              <a:t>Apelación al miedo (ad metum)</a:t>
             </a:r>
           </a:p>
         </p:txBody>
@@ -6788,7 +7369,7 @@
                 </a:solidFill>
                 <a:latin typeface="Nunito Sans"/>
               </a:rPr>
-              <a:t>Creer que una cosa causa otra solo porque pasó antes o porque ocurren juntas, sin mirar otras explicaciones.</a:t>
+              <a:t>Convencer asustando, en lugar de dar razones: con un peligro que no se demuestra o que no viene a cuento.</a:t>
             </a:r>
           </a:p>
         </p:txBody>
@@ -6830,13 +7411,22 @@
               <a:t>• </a:t>
             </a:r>
             <a:r>
+              <a:rPr sz="2800" b="0">
+                <a:solidFill>
+                  <a:srgbClr val="1F2A44"/>
+                </a:solidFill>
+                <a:latin typeface="Nunito Sans"/>
+              </a:rPr>
+              <a:t>Busca que decidas </a:t>
+            </a:r>
+            <a:r>
               <a:rPr sz="2800" b="1">
                 <a:solidFill>
                   <a:srgbClr val="1F2A44"/>
                 </a:solidFill>
                 <a:latin typeface="Nunito Sans"/>
               </a:rPr>
-              <a:t>Causa</a:t>
+              <a:t>rápido</a:t>
             </a:r>
             <a:r>
               <a:rPr sz="2800" b="0">
@@ -6845,7 +7435,7 @@
                 </a:solidFill>
                 <a:latin typeface="Nunito Sans"/>
               </a:rPr>
-              <a:t>: lo que hace que ocurra otra cosa</a:t>
+              <a:t>, sin pensar</a:t>
             </a:r>
           </a:p>
           <a:p>
@@ -6870,102 +7460,41 @@
                 </a:solidFill>
                 <a:latin typeface="Nunito Sans"/>
               </a:rPr>
-              <a:t>En latín, </a:t>
-            </a:r>
+              <a:t>Cadenas de WhatsApp, anuncios, rumores</a:t>
+            </a:r>
+          </a:p>
+          <a:p>
+            <a:pPr>
+              <a:spcAft>
+                <a:spcPts val="1260"/>
+              </a:spcAft>
+            </a:pPr>
             <a:r>
               <a:rPr sz="2800" b="1">
                 <a:solidFill>
+                  <a:srgbClr val="E8793A"/>
+                </a:solidFill>
+                <a:latin typeface="Nunito Sans"/>
+              </a:rPr>
+              <a:t>• </a:t>
+            </a:r>
+            <a:r>
+              <a:rPr sz="2800" b="0">
+                <a:solidFill>
                   <a:srgbClr val="1F2A44"/>
                 </a:solidFill>
                 <a:latin typeface="Nunito Sans"/>
               </a:rPr>
-              <a:t>post hoc</a:t>
-            </a:r>
-            <a:r>
-              <a:rPr sz="2800" b="0">
+              <a:t>Pregunta: </a:t>
+            </a:r>
+            <a:r>
+              <a:rPr sz="2800" b="1">
                 <a:solidFill>
                   <a:srgbClr val="1F2A44"/>
                 </a:solidFill>
                 <a:latin typeface="Nunito Sans"/>
               </a:rPr>
-              <a:t>: «después de esto»</a:t>
-            </a:r>
-          </a:p>
-          <a:p>
-            <a:pPr>
-              <a:spcAft>
-                <a:spcPts val="1260"/>
-              </a:spcAft>
-            </a:pPr>
-            <a:r>
-              <a:rPr sz="2800" b="1">
-                <a:solidFill>
-                  <a:srgbClr val="E8793A"/>
-                </a:solidFill>
-                <a:latin typeface="Nunito Sans"/>
-              </a:rPr>
-              <a:t>• </a:t>
-            </a:r>
-            <a:r>
-              <a:rPr sz="2800" b="0">
-                <a:solidFill>
-                  <a:srgbClr val="1F2A44"/>
-                </a:solidFill>
-                <a:latin typeface="Nunito Sans"/>
-              </a:rPr>
-              <a:t>«Después de» no es «</a:t>
-            </a:r>
-            <a:r>
-              <a:rPr sz="2800" b="1">
-                <a:solidFill>
-                  <a:srgbClr val="1F2A44"/>
-                </a:solidFill>
-                <a:latin typeface="Nunito Sans"/>
-              </a:rPr>
-              <a:t>por culpa de</a:t>
-            </a:r>
-            <a:r>
-              <a:rPr sz="2800" b="0">
-                <a:solidFill>
-                  <a:srgbClr val="1F2A44"/>
-                </a:solidFill>
-                <a:latin typeface="Nunito Sans"/>
-              </a:rPr>
-              <a:t>»</a:t>
-            </a:r>
-          </a:p>
-          <a:p>
-            <a:pPr>
-              <a:spcAft>
-                <a:spcPts val="1260"/>
-              </a:spcAft>
-            </a:pPr>
-            <a:r>
-              <a:rPr sz="2800" b="1">
-                <a:solidFill>
-                  <a:srgbClr val="E8793A"/>
-                </a:solidFill>
-                <a:latin typeface="Nunito Sans"/>
-              </a:rPr>
-              <a:t>• </a:t>
-            </a:r>
-            <a:r>
-              <a:rPr sz="2800" b="0">
-                <a:solidFill>
-                  <a:srgbClr val="1F2A44"/>
-                </a:solidFill>
-                <a:latin typeface="Nunito Sans"/>
-              </a:rPr>
-              <a:t>Pregunta: </a:t>
-            </a:r>
-            <a:r>
-              <a:rPr sz="2800" b="1">
-                <a:solidFill>
-                  <a:srgbClr val="1F2A44"/>
-                </a:solidFill>
-                <a:latin typeface="Nunito Sans"/>
-              </a:rPr>
-              <a:t>¿podría ser casualidad o haber otra causa?</a:t>
+              <a:t>¿ese peligro es real? ¿Qué pruebas hay?</a:t>
             </a:r>
           </a:p>
         </p:txBody>
@@ -7030,7 +7559,7 @@
                 </a:solidFill>
                 <a:latin typeface="Nunito Sans"/>
               </a:rPr>
-              <a:t>BLOQUE 1 · «DESPUÉS DE» NO ES «POR CULPA DE»</a:t>
+              <a:t>BLOQUE 1 · MIEDO, PENA Y CULPA EN LUGAR DE RAZONES</a:t>
             </a:r>
           </a:p>
         </p:txBody>
@@ -7069,7 +7598,309 @@
                 </a:solidFill>
                 <a:latin typeface="Fredoka"/>
               </a:rPr>
-              <a:t>Dos formas de causa falsa</a:t>
+              <a:t>Apelación a la pena (ad misericordiam)</a:t>
+            </a:r>
+          </a:p>
+        </p:txBody>
+      </p:sp>
+      <p:sp>
+        <p:nvSpPr>
+          <p:cNvPr id="4" name="Rectangle 3"/>
+          <p:cNvSpPr/>
+          <p:nvPr/>
+        </p:nvSpPr>
+        <p:spPr>
+          <a:xfrm>
+            <a:off x="640000" y="1650000"/>
+            <a:ext cx="10912000" cy="1150000"/>
+          </a:xfrm>
+          <a:prstGeom prst="rect">
+            <a:avLst/>
+          </a:prstGeom>
+          <a:solidFill>
+            <a:srgbClr val="EAF0F7"/>
+          </a:solidFill>
+          <a:ln>
+            <a:noFill/>
+          </a:ln>
+        </p:spPr>
+        <p:style>
+          <a:lnRef idx="1">
+            <a:schemeClr val="accent1"/>
+          </a:lnRef>
+          <a:fillRef idx="3">
+            <a:schemeClr val="accent1"/>
+          </a:fillRef>
+          <a:effectRef idx="2">
+            <a:schemeClr val="accent1"/>
+          </a:effectRef>
+          <a:fontRef idx="minor">
+            <a:schemeClr val="lt1"/>
+          </a:fontRef>
+        </p:style>
+        <p:txBody>
+          <a:bodyPr rtlCol="0" anchor="ctr"/>
+          <a:lstStyle/>
+          <a:p>
+            <a:pPr algn="ctr"/>
+          </a:p>
+        </p:txBody>
+      </p:sp>
+      <p:sp>
+        <p:nvSpPr>
+          <p:cNvPr id="5" name="TextBox 4"/>
+          <p:cNvSpPr txBox="1"/>
+          <p:nvPr/>
+        </p:nvSpPr>
+        <p:spPr>
+          <a:xfrm>
+            <a:off x="840000" y="1730000"/>
+            <a:ext cx="10512000" cy="1000000"/>
+          </a:xfrm>
+          <a:prstGeom prst="rect">
+            <a:avLst/>
+          </a:prstGeom>
+          <a:noFill/>
+        </p:spPr>
+        <p:txBody>
+          <a:bodyPr wrap="square" anchor="ctr">
+            <a:spAutoFit/>
+          </a:bodyPr>
+          <a:lstStyle/>
+          <a:p>
+            <a:pPr>
+              <a:spcAft>
+                <a:spcPts val="1260"/>
+              </a:spcAft>
+            </a:pPr>
+            <a:r>
+              <a:rPr sz="2800" b="1">
+                <a:solidFill>
+                  <a:srgbClr val="1F2A44"/>
+                </a:solidFill>
+                <a:latin typeface="Nunito Sans"/>
+              </a:rPr>
+              <a:t>Convencer dando pena en lugar de dar razones sobre lo que se discute.</a:t>
+            </a:r>
+          </a:p>
+        </p:txBody>
+      </p:sp>
+      <p:sp>
+        <p:nvSpPr>
+          <p:cNvPr id="6" name="TextBox 5"/>
+          <p:cNvSpPr txBox="1"/>
+          <p:nvPr/>
+        </p:nvSpPr>
+        <p:spPr>
+          <a:xfrm>
+            <a:off x="640000" y="3000000"/>
+            <a:ext cx="10912000" cy="3458000"/>
+          </a:xfrm>
+          <a:prstGeom prst="rect">
+            <a:avLst/>
+          </a:prstGeom>
+          <a:noFill/>
+        </p:spPr>
+        <p:txBody>
+          <a:bodyPr wrap="square">
+            <a:spAutoFit/>
+          </a:bodyPr>
+          <a:lstStyle/>
+          <a:p>
+            <a:pPr>
+              <a:spcAft>
+                <a:spcPts val="1260"/>
+              </a:spcAft>
+            </a:pPr>
+            <a:r>
+              <a:rPr sz="2800" b="1">
+                <a:solidFill>
+                  <a:srgbClr val="E8793A"/>
+                </a:solidFill>
+                <a:latin typeface="Nunito Sans"/>
+              </a:rPr>
+              <a:t>• </a:t>
+            </a:r>
+            <a:r>
+              <a:rPr sz="2800" b="0">
+                <a:solidFill>
+                  <a:srgbClr val="1F2A44"/>
+                </a:solidFill>
+                <a:latin typeface="Nunito Sans"/>
+              </a:rPr>
+              <a:t>También se llama apelación a la </a:t>
+            </a:r>
+            <a:r>
+              <a:rPr sz="2800" b="1">
+                <a:solidFill>
+                  <a:srgbClr val="1F2A44"/>
+                </a:solidFill>
+                <a:latin typeface="Nunito Sans"/>
+              </a:rPr>
+              <a:t>compasión</a:t>
+            </a:r>
+          </a:p>
+          <a:p>
+            <a:pPr>
+              <a:spcAft>
+                <a:spcPts val="1260"/>
+              </a:spcAft>
+            </a:pPr>
+            <a:r>
+              <a:rPr sz="2800" b="1">
+                <a:solidFill>
+                  <a:srgbClr val="E8793A"/>
+                </a:solidFill>
+                <a:latin typeface="Nunito Sans"/>
+              </a:rPr>
+              <a:t>• </a:t>
+            </a:r>
+            <a:r>
+              <a:rPr sz="2800" b="0">
+                <a:solidFill>
+                  <a:srgbClr val="1F2A44"/>
+                </a:solidFill>
+                <a:latin typeface="Nunito Sans"/>
+              </a:rPr>
+              <a:t>La pena puede ser real, pero no responde</a:t>
+            </a:r>
+          </a:p>
+          <a:p>
+            <a:pPr>
+              <a:spcAft>
+                <a:spcPts val="1260"/>
+              </a:spcAft>
+            </a:pPr>
+            <a:r>
+              <a:rPr sz="2800" b="1">
+                <a:solidFill>
+                  <a:srgbClr val="E8793A"/>
+                </a:solidFill>
+                <a:latin typeface="Nunito Sans"/>
+              </a:rPr>
+              <a:t>• </a:t>
+            </a:r>
+            <a:r>
+              <a:rPr sz="2800" b="0">
+                <a:solidFill>
+                  <a:srgbClr val="1F2A44"/>
+                </a:solidFill>
+                <a:latin typeface="Nunito Sans"/>
+              </a:rPr>
+              <a:t>Pregunta: </a:t>
+            </a:r>
+            <a:r>
+              <a:rPr sz="2800" b="1">
+                <a:solidFill>
+                  <a:srgbClr val="1F2A44"/>
+                </a:solidFill>
+                <a:latin typeface="Nunito Sans"/>
+              </a:rPr>
+              <a:t>si quito la pena, ¿qué razón queda?</a:t>
+            </a:r>
+          </a:p>
+        </p:txBody>
+      </p:sp>
+    </p:spTree>
+  </p:cSld>
+  <p:clrMapOvr>
+    <a:masterClrMapping/>
+  </p:clrMapOvr>
+</p:sld>
+</file>
+
+<file path=ppt/slides/slide8.xml><?xml version="1.0" encoding="utf-8"?>
+<p:sld xmlns:a="http://schemas.openxmlformats.org/drawingml/2006/main" xmlns:p="http://schemas.openxmlformats.org/presentationml/2006/main" xmlns:r="http://schemas.openxmlformats.org/officeDocument/2006/relationships">
+  <p:cSld>
+    <p:bg>
+      <p:bgPr>
+        <a:solidFill>
+          <a:srgbClr val="FBF7EF"/>
+        </a:solidFill>
+        <a:effectLst/>
+      </p:bgPr>
+    </p:bg>
+    <p:spTree>
+      <p:nvGrpSpPr>
+        <p:cNvPr id="1" name=""/>
+        <p:cNvGrpSpPr/>
+        <p:nvPr/>
+      </p:nvGrpSpPr>
+      <p:grpSpPr/>
+      <p:sp>
+        <p:nvSpPr>
+          <p:cNvPr id="2" name="TextBox 1"/>
+          <p:cNvSpPr txBox="1"/>
+          <p:nvPr/>
+        </p:nvSpPr>
+        <p:spPr>
+          <a:xfrm>
+            <a:off x="640000" y="380000"/>
+            <a:ext cx="10912000" cy="420000"/>
+          </a:xfrm>
+          <a:prstGeom prst="rect">
+            <a:avLst/>
+          </a:prstGeom>
+          <a:noFill/>
+        </p:spPr>
+        <p:txBody>
+          <a:bodyPr wrap="square">
+            <a:spAutoFit/>
+          </a:bodyPr>
+          <a:lstStyle/>
+          <a:p>
+            <a:pPr>
+              <a:spcAft>
+                <a:spcPts val="630"/>
+              </a:spcAft>
+            </a:pPr>
+            <a:r>
+              <a:rPr sz="1400" b="1">
+                <a:solidFill>
+                  <a:srgbClr val="E8793A"/>
+                </a:solidFill>
+                <a:latin typeface="Nunito Sans"/>
+              </a:rPr>
+              <a:t>BLOQUE 1 · MIEDO, PENA Y CULPA EN LUGAR DE RAZONES</a:t>
+            </a:r>
+          </a:p>
+        </p:txBody>
+      </p:sp>
+      <p:sp>
+        <p:nvSpPr>
+          <p:cNvPr id="3" name="TextBox 2"/>
+          <p:cNvSpPr txBox="1"/>
+          <p:nvPr/>
+        </p:nvSpPr>
+        <p:spPr>
+          <a:xfrm>
+            <a:off x="640000" y="760000"/>
+            <a:ext cx="10912000" cy="800000"/>
+          </a:xfrm>
+          <a:prstGeom prst="rect">
+            <a:avLst/>
+          </a:prstGeom>
+          <a:noFill/>
+        </p:spPr>
+        <p:txBody>
+          <a:bodyPr wrap="square">
+            <a:spAutoFit/>
+          </a:bodyPr>
+          <a:lstStyle/>
+          <a:p>
+            <a:pPr>
+              <a:spcAft>
+                <a:spcPts val="1710"/>
+              </a:spcAft>
+            </a:pPr>
+            <a:r>
+              <a:rPr sz="3800" b="1">
+                <a:solidFill>
+                  <a:srgbClr val="1F2A44"/>
+                </a:solidFill>
+                <a:latin typeface="Fredoka"/>
+              </a:rPr>
+              <a:t>Cómo reconocerlas</a:t>
             </a:r>
           </a:p>
         </p:txBody>
@@ -7084,7 +7915,7 @@
         </p:nvGraphicFramePr>
         <p:xfrm>
           <a:off x="640000" y="1700000"/>
-          <a:ext cx="10912000" cy="1800000"/>
+          <a:ext cx="10912000" cy="2400000"/>
         </p:xfrm>
         <a:graphic>
           <a:graphicData uri="http://schemas.openxmlformats.org/drawingml/2006/table">
@@ -7110,7 +7941,7 @@
                           </a:solidFill>
                           <a:latin typeface="Fredoka"/>
                         </a:rPr>
-                        <a:t>Forma</a:t>
+                        <a:t>Falacia</a:t>
                       </a:r>
                     </a:p>
                   </a:txBody>
@@ -7132,7 +7963,7 @@
                           </a:solidFill>
                           <a:latin typeface="Fredoka"/>
                         </a:rPr>
-                        <a:t>El error</a:t>
+                        <a:t>Señal</a:t>
                       </a:r>
                     </a:p>
                   </a:txBody>
@@ -7172,13 +8003,13 @@
                     <a:lstStyle/>
                     <a:p>
                       <a:r>
-                        <a:rPr sz="2000" b="1">
+                        <a:rPr sz="2000" b="0">
                           <a:solidFill>
                             <a:srgbClr val="1F2A44"/>
                           </a:solidFill>
                           <a:latin typeface="Nunito Sans"/>
                         </a:rPr>
-                        <a:t>Después de</a:t>
+                        <a:t>Miedo</a:t>
                       </a:r>
                     </a:p>
                   </a:txBody>
@@ -7200,7 +8031,7 @@
                           </a:solidFill>
                           <a:latin typeface="Nunito Sans"/>
                         </a:rPr>
-                        <a:t>Pasó antes, así que fue la causa</a:t>
+                        <a:t>«Si no…, pasará algo terrible»</a:t>
                       </a:r>
                     </a:p>
                   </a:txBody>
@@ -7222,7 +8053,7 @@
                           </a:solidFill>
                           <a:latin typeface="Nunito Sans"/>
                         </a:rPr>
-                        <a:t>«Me corté el pelo y perdimos el partido»</a:t>
+                        <a:t>«Sin esta funda, perderás todas tus fotos»</a:t>
                       </a:r>
                     </a:p>
                   </a:txBody>
@@ -7240,22 +8071,13 @@
                     <a:lstStyle/>
                     <a:p>
                       <a:r>
-                        <a:rPr sz="2000" b="1">
-                          <a:solidFill>
-                            <a:srgbClr val="1F2A44"/>
-                          </a:solidFill>
-                          <a:latin typeface="Nunito Sans"/>
-                        </a:rPr>
-                        <a:t>A la vez</a:t>
-                      </a:r>
-                      <a:r>
                         <a:rPr sz="2000" b="0">
                           <a:solidFill>
                             <a:srgbClr val="1F2A44"/>
                           </a:solidFill>
                           <a:latin typeface="Nunito Sans"/>
                         </a:rPr>
-                        <a:t> (correlación)</a:t>
+                        <a:t>Pena</a:t>
                       </a:r>
                     </a:p>
                   </a:txBody>
@@ -7277,7 +8099,7 @@
                           </a:solidFill>
                           <a:latin typeface="Nunito Sans"/>
                         </a:rPr>
-                        <a:t>Van juntas, así que una causa la otra</a:t>
+                        <a:t>Tristeza en lugar de razones</a:t>
                       </a:r>
                     </a:p>
                   </a:txBody>
@@ -7299,13 +8121,81 @@
                           </a:solidFill>
                           <a:latin typeface="Nunito Sans"/>
                         </a:rPr>
-                        <a:t>«Hay más helados y más quemaduras: los helados queman»</a:t>
+                        <a:t>«Apruébame, que si no me castigan»</a:t>
                       </a:r>
                     </a:p>
                   </a:txBody>
                   <a:tcPr>
                     <a:solidFill>
                       <a:srgbClr val="EAF0F7"/>
+                    </a:solidFill>
+                  </a:tcPr>
+                </a:tc>
+              </a:tr>
+              <a:tr h="600000">
+                <a:tc>
+                  <a:txBody>
+                    <a:bodyPr/>
+                    <a:lstStyle/>
+                    <a:p>
+                      <a:r>
+                        <a:rPr sz="2000" b="0">
+                          <a:solidFill>
+                            <a:srgbClr val="1F2A44"/>
+                          </a:solidFill>
+                          <a:latin typeface="Nunito Sans"/>
+                        </a:rPr>
+                        <a:t>Culpa</a:t>
+                      </a:r>
+                    </a:p>
+                  </a:txBody>
+                  <a:tcPr>
+                    <a:solidFill>
+                      <a:srgbClr val="FFFFFF"/>
+                    </a:solidFill>
+                  </a:tcPr>
+                </a:tc>
+                <a:tc>
+                  <a:txBody>
+                    <a:bodyPr/>
+                    <a:lstStyle/>
+                    <a:p>
+                      <a:r>
+                        <a:rPr sz="2000" b="0">
+                          <a:solidFill>
+                            <a:srgbClr val="1F2A44"/>
+                          </a:solidFill>
+                          <a:latin typeface="Nunito Sans"/>
+                        </a:rPr>
+                        <a:t>«Si de verdad te importara tu familia…»</a:t>
+                      </a:r>
+                    </a:p>
+                  </a:txBody>
+                  <a:tcPr>
+                    <a:solidFill>
+                      <a:srgbClr val="FFFFFF"/>
+                    </a:solidFill>
+                  </a:tcPr>
+                </a:tc>
+                <a:tc>
+                  <a:txBody>
+                    <a:bodyPr/>
+                    <a:lstStyle/>
+                    <a:p>
+                      <a:r>
+                        <a:rPr sz="2000" b="0">
+                          <a:solidFill>
+                            <a:srgbClr val="1F2A44"/>
+                          </a:solidFill>
+                          <a:latin typeface="Nunito Sans"/>
+                        </a:rPr>
+                        <a:t>«Compártelo o eres mala persona»</a:t>
+                      </a:r>
+                    </a:p>
+                  </a:txBody>
+                  <a:tcPr>
+                    <a:solidFill>
+                      <a:srgbClr val="FFFFFF"/>
                     </a:solidFill>
                   </a:tcPr>
                 </a:tc>
@@ -7322,7 +8212,7 @@
 </p:sld>
 </file>
 
-<file path=ppt/slides/slide8.xml><?xml version="1.0" encoding="utf-8"?>
+<file path=ppt/slides/slide9.xml><?xml version="1.0" encoding="utf-8"?>
 <p:sld xmlns:a="http://schemas.openxmlformats.org/drawingml/2006/main" xmlns:p="http://schemas.openxmlformats.org/presentationml/2006/main" xmlns:r="http://schemas.openxmlformats.org/officeDocument/2006/relationships">
   <p:cSld>
     <p:bg>
@@ -7414,315 +8304,6 @@
                 <a:latin typeface="Fredoka"/>
               </a:rPr>
               <a:t>Casos resueltos</a:t>
-            </a:r>
-          </a:p>
-        </p:txBody>
-      </p:sp>
-    </p:spTree>
-  </p:cSld>
-  <p:clrMapOvr>
-    <a:masterClrMapping/>
-  </p:clrMapOvr>
-</p:sld>
-</file>
-
-<file path=ppt/slides/slide9.xml><?xml version="1.0" encoding="utf-8"?>
-<p:sld xmlns:a="http://schemas.openxmlformats.org/drawingml/2006/main" xmlns:p="http://schemas.openxmlformats.org/presentationml/2006/main" xmlns:r="http://schemas.openxmlformats.org/officeDocument/2006/relationships">
-  <p:cSld>
-    <p:bg>
-      <p:bgPr>
-        <a:solidFill>
-          <a:srgbClr val="FBF7EF"/>
-        </a:solidFill>
-        <a:effectLst/>
-      </p:bgPr>
-    </p:bg>
-    <p:spTree>
-      <p:nvGrpSpPr>
-        <p:cNvPr id="1" name=""/>
-        <p:cNvGrpSpPr/>
-        <p:nvPr/>
-      </p:nvGrpSpPr>
-      <p:grpSpPr/>
-      <p:sp>
-        <p:nvSpPr>
-          <p:cNvPr id="2" name="TextBox 1"/>
-          <p:cNvSpPr txBox="1"/>
-          <p:nvPr/>
-        </p:nvSpPr>
-        <p:spPr>
-          <a:xfrm>
-            <a:off x="640000" y="380000"/>
-            <a:ext cx="10912000" cy="420000"/>
-          </a:xfrm>
-          <a:prstGeom prst="rect">
-            <a:avLst/>
-          </a:prstGeom>
-          <a:noFill/>
-        </p:spPr>
-        <p:txBody>
-          <a:bodyPr wrap="square">
-            <a:spAutoFit/>
-          </a:bodyPr>
-          <a:lstStyle/>
-          <a:p>
-            <a:pPr>
-              <a:spcAft>
-                <a:spcPts val="630"/>
-              </a:spcAft>
-            </a:pPr>
-            <a:r>
-              <a:rPr sz="1400" b="1">
-                <a:solidFill>
-                  <a:srgbClr val="E8793A"/>
-                </a:solidFill>
-                <a:latin typeface="Nunito Sans"/>
-              </a:rPr>
-              <a:t>BLOQUE 2 · CASOS RESUELTOS</a:t>
-            </a:r>
-          </a:p>
-        </p:txBody>
-      </p:sp>
-      <p:sp>
-        <p:nvSpPr>
-          <p:cNvPr id="3" name="TextBox 2"/>
-          <p:cNvSpPr txBox="1"/>
-          <p:nvPr/>
-        </p:nvSpPr>
-        <p:spPr>
-          <a:xfrm>
-            <a:off x="640000" y="760000"/>
-            <a:ext cx="10912000" cy="800000"/>
-          </a:xfrm>
-          <a:prstGeom prst="rect">
-            <a:avLst/>
-          </a:prstGeom>
-          <a:noFill/>
-        </p:spPr>
-        <p:txBody>
-          <a:bodyPr wrap="square">
-            <a:spAutoFit/>
-          </a:bodyPr>
-          <a:lstStyle/>
-          <a:p>
-            <a:pPr>
-              <a:spcAft>
-                <a:spcPts val="1710"/>
-              </a:spcAft>
-            </a:pPr>
-            <a:r>
-              <a:rPr sz="3800" b="1">
-                <a:solidFill>
-                  <a:srgbClr val="1F2A44"/>
-                </a:solidFill>
-                <a:latin typeface="Fredoka"/>
-              </a:rPr>
-              <a:t>Caso 1 · La pulsera roja</a:t>
-            </a:r>
-          </a:p>
-        </p:txBody>
-      </p:sp>
-      <p:sp>
-        <p:nvSpPr>
-          <p:cNvPr id="4" name="Rectangle 3"/>
-          <p:cNvSpPr/>
-          <p:nvPr/>
-        </p:nvSpPr>
-        <p:spPr>
-          <a:xfrm>
-            <a:off x="640000" y="1600000"/>
-            <a:ext cx="10912000" cy="1100000"/>
-          </a:xfrm>
-          <a:prstGeom prst="rect">
-            <a:avLst/>
-          </a:prstGeom>
-          <a:solidFill>
-            <a:srgbClr val="FFFFFF"/>
-          </a:solidFill>
-          <a:ln>
-            <a:noFill/>
-          </a:ln>
-        </p:spPr>
-        <p:style>
-          <a:lnRef idx="1">
-            <a:schemeClr val="accent1"/>
-          </a:lnRef>
-          <a:fillRef idx="3">
-            <a:schemeClr val="accent1"/>
-          </a:fillRef>
-          <a:effectRef idx="2">
-            <a:schemeClr val="accent1"/>
-          </a:effectRef>
-          <a:fontRef idx="minor">
-            <a:schemeClr val="lt1"/>
-          </a:fontRef>
-        </p:style>
-        <p:txBody>
-          <a:bodyPr rtlCol="0" anchor="ctr"/>
-          <a:lstStyle/>
-          <a:p>
-            <a:pPr algn="ctr"/>
-          </a:p>
-        </p:txBody>
-      </p:sp>
-      <p:sp>
-        <p:nvSpPr>
-          <p:cNvPr id="5" name="TextBox 4"/>
-          <p:cNvSpPr txBox="1"/>
-          <p:nvPr/>
-        </p:nvSpPr>
-        <p:spPr>
-          <a:xfrm>
-            <a:off x="840000" y="1650000"/>
-            <a:ext cx="10512000" cy="1000000"/>
-          </a:xfrm>
-          <a:prstGeom prst="rect">
-            <a:avLst/>
-          </a:prstGeom>
-          <a:noFill/>
-        </p:spPr>
-        <p:txBody>
-          <a:bodyPr wrap="square" anchor="ctr">
-            <a:spAutoFit/>
-          </a:bodyPr>
-          <a:lstStyle/>
-          <a:p>
-            <a:pPr>
-              <a:spcAft>
-                <a:spcPts val="1170"/>
-              </a:spcAft>
-            </a:pPr>
-            <a:r>
-              <a:rPr sz="2600" b="1">
-                <a:solidFill>
-                  <a:srgbClr val="1F2A44"/>
-                </a:solidFill>
-                <a:latin typeface="Nunito Sans"/>
-              </a:rPr>
-              <a:t>«Desde que llevo la pulsera roja, el Athletic ha ganado tres partidos seguidos. Esta pulsera da suerte.»</a:t>
-            </a:r>
-          </a:p>
-        </p:txBody>
-      </p:sp>
-      <p:sp>
-        <p:nvSpPr>
-          <p:cNvPr id="6" name="TextBox 5"/>
-          <p:cNvSpPr txBox="1"/>
-          <p:nvPr/>
-        </p:nvSpPr>
-        <p:spPr>
-          <a:xfrm>
-            <a:off x="640000" y="2900000"/>
-            <a:ext cx="10912000" cy="3500000"/>
-          </a:xfrm>
-          <a:prstGeom prst="rect">
-            <a:avLst/>
-          </a:prstGeom>
-          <a:noFill/>
-        </p:spPr>
-        <p:txBody>
-          <a:bodyPr wrap="square">
-            <a:spAutoFit/>
-          </a:bodyPr>
-          <a:lstStyle/>
-          <a:p>
-            <a:pPr>
-              <a:spcAft>
-                <a:spcPts val="1080"/>
-              </a:spcAft>
-            </a:pPr>
-            <a:r>
-              <a:rPr sz="2400" b="1">
-                <a:solidFill>
-                  <a:srgbClr val="E8793A"/>
-                </a:solidFill>
-                <a:latin typeface="Nunito Sans"/>
-              </a:rPr>
-              <a:t>1. </a:t>
-            </a:r>
-            <a:r>
-              <a:rPr sz="2400" b="0">
-                <a:solidFill>
-                  <a:srgbClr val="1F2A44"/>
-                </a:solidFill>
-                <a:latin typeface="Nunito Sans"/>
-              </a:rPr>
-              <a:t>¿Qué pasó antes? Ponerse la pulsera.</a:t>
-            </a:r>
-          </a:p>
-          <a:p>
-            <a:pPr>
-              <a:spcAft>
-                <a:spcPts val="1080"/>
-              </a:spcAft>
-            </a:pPr>
-            <a:r>
-              <a:rPr sz="2400" b="1">
-                <a:solidFill>
-                  <a:srgbClr val="E8793A"/>
-                </a:solidFill>
-                <a:latin typeface="Nunito Sans"/>
-              </a:rPr>
-              <a:t>2. </a:t>
-            </a:r>
-            <a:r>
-              <a:rPr sz="2400" b="0">
-                <a:solidFill>
-                  <a:srgbClr val="1F2A44"/>
-                </a:solidFill>
-                <a:latin typeface="Nunito Sans"/>
-              </a:rPr>
-              <a:t>¿Qué pasó después? Tres victorias.</a:t>
-            </a:r>
-          </a:p>
-          <a:p>
-            <a:pPr>
-              <a:spcAft>
-                <a:spcPts val="1080"/>
-              </a:spcAft>
-            </a:pPr>
-            <a:r>
-              <a:rPr sz="2400" b="1">
-                <a:solidFill>
-                  <a:srgbClr val="E8793A"/>
-                </a:solidFill>
-                <a:latin typeface="Nunito Sans"/>
-              </a:rPr>
-              <a:t>3. </a:t>
-            </a:r>
-            <a:r>
-              <a:rPr sz="2400" b="0">
-                <a:solidFill>
-                  <a:srgbClr val="1F2A44"/>
-                </a:solidFill>
-                <a:latin typeface="Nunito Sans"/>
-              </a:rPr>
-              <a:t>¿Otra explicación? El equipo jugó bien, los rivales eran flojos o fue casualidad.</a:t>
-            </a:r>
-          </a:p>
-          <a:p>
-            <a:pPr>
-              <a:spcAft>
-                <a:spcPts val="1080"/>
-              </a:spcAft>
-            </a:pPr>
-            <a:r>
-              <a:rPr sz="2400" b="1">
-                <a:solidFill>
-                  <a:srgbClr val="E8793A"/>
-                </a:solidFill>
-                <a:latin typeface="Nunito Sans"/>
-              </a:rPr>
-              <a:t>4. </a:t>
-            </a:r>
-            <a:r>
-              <a:rPr sz="2400" b="0">
-                <a:solidFill>
-                  <a:srgbClr val="1F2A44"/>
-                </a:solidFill>
-                <a:latin typeface="Nunito Sans"/>
-              </a:rPr>
-              <a:t>Conclusión: causa falsa (post hoc). «Después de» no es «por culpa de».</a:t>
             </a:r>
           </a:p>
         </p:txBody>
